--- a/courses/build/farmer-5day/F-D5.pptx
+++ b/courses/build/farmer-5day/F-D5.pptx
@@ -590,7 +590,7 @@
           <a:lstStyle/>
           <a:p>
             <a:r>
-              <a:t>[APP] twin: log the harvest in Records / Field Journal. Then the garden handover roster.</a:t>
+              <a:t>[APP] twin: log the harvest in Records → Picked. Then the garden handover roster.</a:t>
             </a:r>
           </a:p>
           <a:p/>
@@ -812,7 +812,7 @@
           <a:lstStyle/>
           <a:p>
             <a:r>
-              <a:t>Everyone writes their card's lines. [APP] twin: Finances → Money in / Money out, scan a till slip.</a:t>
+              <a:t>Everyone writes their card's lines. [APP] twin: Records → Sold and Spent; scan a till slip in a Spent entry.</a:t>
             </a:r>
           </a:p>
           <a:p/>

--- a/courses/build/farmer-5day/F-D5.pptx
+++ b/courses/build/farmer-5day/F-D5.pptx
@@ -4873,7 +4873,7 @@
     <p:bg>
       <p:bgPr>
         <a:solidFill>
-          <a:srgbClr val="1F4D2B"/>
+          <a:srgbClr val="2F5D34"/>
         </a:solidFill>
         <a:effectLst/>
       </p:bgPr>
@@ -4915,9 +4915,9 @@
             <a:r>
               <a:rPr sz="1000" b="0">
                 <a:solidFill>
-                  <a:srgbClr val="A8D88A"/>
-                </a:solidFill>
-                <a:latin typeface="Arial"/>
+                  <a:srgbClr val="EFE6D2"/>
+                </a:solidFill>
+                <a:latin typeface="Verdana"/>
               </a:rPr>
               <a:t>F-D5-01</a:t>
             </a:r>
@@ -4954,9 +4954,9 @@
             <a:r>
               <a:rPr sz="1000" b="0">
                 <a:solidFill>
-                  <a:srgbClr val="A8D88A"/>
-                </a:solidFill>
-                <a:latin typeface="Arial"/>
+                  <a:srgbClr val="EFE6D2"/>
+                </a:solidFill>
+                <a:latin typeface="Verdana"/>
               </a:rPr>
               <a:t>Grow Food, Grow Strong</a:t>
             </a:r>
@@ -4993,9 +4993,9 @@
             <a:r>
               <a:rPr sz="4800" b="1">
                 <a:solidFill>
-                  <a:srgbClr val="F7F2E9"/>
-                </a:solidFill>
-                <a:latin typeface="Georgia"/>
+                  <a:srgbClr val="EFE6D2"/>
+                </a:solidFill>
+                <a:latin typeface="Rockwell"/>
               </a:rPr>
               <a:t>Day 5 · Seed, food, money</a:t>
             </a:r>
@@ -5017,7 +5017,7 @@
             <a:avLst/>
           </a:prstGeom>
           <a:solidFill>
-            <a:srgbClr val="C07A1E"/>
+            <a:srgbClr val="B24E2A"/>
           </a:solidFill>
           <a:ln>
             <a:noFill/>
@@ -5076,9 +5076,9 @@
             <a:r>
               <a:rPr sz="2400" b="0">
                 <a:solidFill>
-                  <a:srgbClr val="A8D88A"/>
-                </a:solidFill>
-                <a:latin typeface="Arial"/>
+                  <a:srgbClr val="EFE6D2"/>
+                </a:solidFill>
+                <a:latin typeface="Verdana"/>
               </a:rPr>
               <a:t>Closing the circle</a:t>
             </a:r>
@@ -5100,11 +5100,11 @@
             <a:avLst/>
           </a:prstGeom>
           <a:solidFill>
-            <a:srgbClr val="FBF6EC"/>
+            <a:srgbClr val="EFE6D2"/>
           </a:solidFill>
           <a:ln w="15875">
             <a:solidFill>
-              <a:srgbClr val="E2D8C4"/>
+              <a:srgbClr val="2F5D34"/>
             </a:solidFill>
           </a:ln>
           <a:effectLst/>
@@ -5161,9 +5161,9 @@
             <a:r>
               <a:rPr sz="1200" b="1">
                 <a:solidFill>
-                  <a:srgbClr val="C07A1E"/>
-                </a:solidFill>
-                <a:latin typeface="Arial"/>
+                  <a:srgbClr val="B24E2A"/>
+                </a:solidFill>
+                <a:latin typeface="Verdana"/>
               </a:rPr>
               <a:t>IMAGE · F-IMG-31 · coming</a:t>
             </a:r>
@@ -5200,9 +5200,9 @@
             <a:r>
               <a:rPr sz="1800" b="1">
                 <a:solidFill>
-                  <a:srgbClr val="1F4D2B"/>
-                </a:solidFill>
-                <a:latin typeface="Georgia"/>
+                  <a:srgbClr val="1B1A17"/>
+                </a:solidFill>
+                <a:latin typeface="Rockwell"/>
               </a:rPr>
               <a:t>Seed table</a:t>
             </a:r>
@@ -5239,9 +5239,9 @@
             <a:r>
               <a:rPr sz="1100" b="0">
                 <a:solidFill>
-                  <a:srgbClr val="20190F"/>
-                </a:solidFill>
-                <a:latin typeface="Arial"/>
+                  <a:srgbClr val="1B1A17"/>
+                </a:solidFill>
+                <a:latin typeface="Verdana"/>
               </a:rPr>
               <a:t>A table covered with small labelled heaps of different seeds (beans of many colours, maize, pumpkin seed) and paper envelopes; hands reaching in.</a:t>
             </a:r>
@@ -5262,7 +5262,7 @@
     <p:bg>
       <p:bgPr>
         <a:solidFill>
-          <a:srgbClr val="F7F2E9"/>
+          <a:srgbClr val="EFE6D2"/>
         </a:solidFill>
         <a:effectLst/>
       </p:bgPr>
@@ -5304,9 +5304,9 @@
             <a:r>
               <a:rPr sz="1000" b="0">
                 <a:solidFill>
-                  <a:srgbClr val="6B6255"/>
-                </a:solidFill>
-                <a:latin typeface="Arial"/>
+                  <a:srgbClr val="1B1A17"/>
+                </a:solidFill>
+                <a:latin typeface="Verdana"/>
               </a:rPr>
               <a:t>F-D5-10</a:t>
             </a:r>
@@ -5343,9 +5343,9 @@
             <a:r>
               <a:rPr sz="1000" b="0">
                 <a:solidFill>
-                  <a:srgbClr val="6B6255"/>
-                </a:solidFill>
-                <a:latin typeface="Arial"/>
+                  <a:srgbClr val="1B1A17"/>
+                </a:solidFill>
+                <a:latin typeface="Verdana"/>
               </a:rPr>
               <a:t>Grow Food, Grow Strong</a:t>
             </a:r>
@@ -5367,7 +5367,7 @@
             <a:avLst/>
           </a:prstGeom>
           <a:solidFill>
-            <a:srgbClr val="C07A1E"/>
+            <a:srgbClr val="B24E2A"/>
           </a:solidFill>
           <a:ln>
             <a:noFill/>
@@ -5426,9 +5426,9 @@
             <a:r>
               <a:rPr sz="1400" b="1">
                 <a:solidFill>
-                  <a:srgbClr val="F7F2E9"/>
-                </a:solidFill>
-                <a:latin typeface="Arial"/>
+                  <a:srgbClr val="EFE6D2"/>
+                </a:solidFill>
+                <a:latin typeface="Verdana"/>
               </a:rPr>
               <a:t>YOUR TURN</a:t>
             </a:r>
@@ -5465,9 +5465,9 @@
             <a:r>
               <a:rPr sz="3800" b="1">
                 <a:solidFill>
-                  <a:srgbClr val="1F4D2B"/>
-                </a:solidFill>
-                <a:latin typeface="Georgia"/>
+                  <a:srgbClr val="1B1A17"/>
+                </a:solidFill>
+                <a:latin typeface="Rockwell"/>
               </a:rPr>
               <a:t>Weigh and write</a:t>
             </a:r>
@@ -5489,7 +5489,7 @@
             <a:avLst/>
           </a:prstGeom>
           <a:solidFill>
-            <a:srgbClr val="E2D8C4"/>
+            <a:srgbClr val="2F5D34"/>
           </a:solidFill>
           <a:ln>
             <a:noFill/>
@@ -5548,9 +5548,9 @@
             <a:r>
               <a:rPr sz="3000" b="1">
                 <a:solidFill>
-                  <a:srgbClr val="20190F"/>
-                </a:solidFill>
-                <a:latin typeface="Arial"/>
+                  <a:srgbClr val="1B1A17"/>
+                </a:solidFill>
+                <a:latin typeface="Verdana"/>
               </a:rPr>
               <a:t>•  Eaten · shared · sold</a:t>
             </a:r>
@@ -5564,9 +5564,9 @@
             <a:r>
               <a:rPr sz="3000" b="1">
                 <a:solidFill>
-                  <a:srgbClr val="20190F"/>
-                </a:solidFill>
-                <a:latin typeface="Arial"/>
+                  <a:srgbClr val="1B1A17"/>
+                </a:solidFill>
+                <a:latin typeface="Verdana"/>
               </a:rPr>
               <a:t>•  Write it on the harvest page</a:t>
             </a:r>
@@ -5612,7 +5612,7 @@
             <a:avLst/>
           </a:prstGeom>
           <a:solidFill>
-            <a:srgbClr val="20190F"/>
+            <a:srgbClr val="1B1A17"/>
           </a:solidFill>
           <a:ln>
             <a:noFill/>
@@ -5671,9 +5671,9 @@
             <a:r>
               <a:rPr sz="1100" b="0">
                 <a:solidFill>
-                  <a:srgbClr val="F7F2E9"/>
-                </a:solidFill>
-                <a:latin typeface="Arial"/>
+                  <a:srgbClr val="EFE6D2"/>
+                </a:solidFill>
+                <a:latin typeface="Verdana"/>
               </a:rPr>
               <a:t>▶  Clip F-ANI-28 · play from the tablet: watch-09-surplus-routes.mp4</a:t>
             </a:r>
@@ -5694,7 +5694,7 @@
     <p:bg>
       <p:bgPr>
         <a:solidFill>
-          <a:srgbClr val="F7F2E9"/>
+          <a:srgbClr val="EFE6D2"/>
         </a:solidFill>
         <a:effectLst/>
       </p:bgPr>
@@ -5736,9 +5736,9 @@
             <a:r>
               <a:rPr sz="1000" b="0">
                 <a:solidFill>
-                  <a:srgbClr val="6B6255"/>
-                </a:solidFill>
-                <a:latin typeface="Arial"/>
+                  <a:srgbClr val="1B1A17"/>
+                </a:solidFill>
+                <a:latin typeface="Verdana"/>
               </a:rPr>
               <a:t>F-D5-11   ·   Poster F-P20</a:t>
             </a:r>
@@ -5775,9 +5775,9 @@
             <a:r>
               <a:rPr sz="1000" b="0">
                 <a:solidFill>
-                  <a:srgbClr val="6B6255"/>
-                </a:solidFill>
-                <a:latin typeface="Arial"/>
+                  <a:srgbClr val="1B1A17"/>
+                </a:solidFill>
+                <a:latin typeface="Verdana"/>
               </a:rPr>
               <a:t>Grow Food, Grow Strong</a:t>
             </a:r>
@@ -5814,9 +5814,9 @@
             <a:r>
               <a:rPr sz="3800" b="1">
                 <a:solidFill>
-                  <a:srgbClr val="1F4D2B"/>
-                </a:solidFill>
-                <a:latin typeface="Georgia"/>
+                  <a:srgbClr val="1B1A17"/>
+                </a:solidFill>
+                <a:latin typeface="Rockwell"/>
               </a:rPr>
               <a:t>Two pockets</a:t>
             </a:r>
@@ -5838,7 +5838,7 @@
             <a:avLst/>
           </a:prstGeom>
           <a:solidFill>
-            <a:srgbClr val="E2D8C4"/>
+            <a:srgbClr val="2F5D34"/>
           </a:solidFill>
           <a:ln>
             <a:noFill/>
@@ -5897,9 +5897,9 @@
             <a:r>
               <a:rPr sz="2400" b="0">
                 <a:solidFill>
-                  <a:srgbClr val="20190F"/>
-                </a:solidFill>
-                <a:latin typeface="Arial"/>
+                  <a:srgbClr val="1B1A17"/>
+                </a:solidFill>
+                <a:latin typeface="Verdana"/>
               </a:rPr>
               <a:t>•  House money · garden money · savings</a:t>
             </a:r>
@@ -5921,11 +5921,11 @@
             <a:avLst/>
           </a:prstGeom>
           <a:solidFill>
-            <a:srgbClr val="FBF6EC"/>
+            <a:srgbClr val="EFE6D2"/>
           </a:solidFill>
           <a:ln w="15875">
             <a:solidFill>
-              <a:srgbClr val="E2D8C4"/>
+              <a:srgbClr val="2F5D34"/>
             </a:solidFill>
           </a:ln>
           <a:effectLst/>
@@ -5982,9 +5982,9 @@
             <a:r>
               <a:rPr sz="1200" b="1">
                 <a:solidFill>
-                  <a:srgbClr val="C07A1E"/>
-                </a:solidFill>
-                <a:latin typeface="Arial"/>
+                  <a:srgbClr val="B24E2A"/>
+                </a:solidFill>
+                <a:latin typeface="Verdana"/>
               </a:rPr>
               <a:t>POSTER ART · F-P20-ART · coming</a:t>
             </a:r>
@@ -6021,9 +6021,9 @@
             <a:r>
               <a:rPr sz="1800" b="1">
                 <a:solidFill>
-                  <a:srgbClr val="1F4D2B"/>
-                </a:solidFill>
-                <a:latin typeface="Georgia"/>
+                  <a:srgbClr val="1B1A17"/>
+                </a:solidFill>
+                <a:latin typeface="Rockwell"/>
               </a:rPr>
               <a:t>Artwork for F-P20 · Money in, money out</a:t>
             </a:r>
@@ -6060,9 +6060,9 @@
             <a:r>
               <a:rPr sz="1100" b="0">
                 <a:solidFill>
-                  <a:srgbClr val="20190F"/>
-                </a:solidFill>
-                <a:latin typeface="Arial"/>
+                  <a:srgbClr val="1B1A17"/>
+                </a:solidFill>
+                <a:latin typeface="Verdana"/>
               </a:rPr>
               <a:t>Top: three tins on a table with picture icons (a house, a seedling, a small safe/piggy-bank-like clay pot). Arrows: vegetables being handed to a buyer and notes coming back into the seedling tin; notes going out of the seedling tin to a seed packet, a manure bag and a taxi. Middle: an open exercise book with two ruled columns — one with a green arrow…</a:t>
             </a:r>
@@ -6083,7 +6083,7 @@
     <p:bg>
       <p:bgPr>
         <a:solidFill>
-          <a:srgbClr val="F7F2E9"/>
+          <a:srgbClr val="EFE6D2"/>
         </a:solidFill>
         <a:effectLst/>
       </p:bgPr>
@@ -6125,9 +6125,9 @@
             <a:r>
               <a:rPr sz="1000" b="0">
                 <a:solidFill>
-                  <a:srgbClr val="6B6255"/>
-                </a:solidFill>
-                <a:latin typeface="Arial"/>
+                  <a:srgbClr val="1B1A17"/>
+                </a:solidFill>
+                <a:latin typeface="Verdana"/>
               </a:rPr>
               <a:t>F-D5-12</a:t>
             </a:r>
@@ -6164,9 +6164,9 @@
             <a:r>
               <a:rPr sz="1000" b="0">
                 <a:solidFill>
-                  <a:srgbClr val="6B6255"/>
-                </a:solidFill>
-                <a:latin typeface="Arial"/>
+                  <a:srgbClr val="1B1A17"/>
+                </a:solidFill>
+                <a:latin typeface="Verdana"/>
               </a:rPr>
               <a:t>Grow Food, Grow Strong</a:t>
             </a:r>
@@ -6188,7 +6188,7 @@
             <a:avLst/>
           </a:prstGeom>
           <a:solidFill>
-            <a:srgbClr val="C07A1E"/>
+            <a:srgbClr val="B24E2A"/>
           </a:solidFill>
           <a:ln>
             <a:noFill/>
@@ -6247,9 +6247,9 @@
             <a:r>
               <a:rPr sz="1400" b="1">
                 <a:solidFill>
-                  <a:srgbClr val="F7F2E9"/>
-                </a:solidFill>
-                <a:latin typeface="Arial"/>
+                  <a:srgbClr val="EFE6D2"/>
+                </a:solidFill>
+                <a:latin typeface="Verdana"/>
               </a:rPr>
               <a:t>YOUR TURN</a:t>
             </a:r>
@@ -6286,9 +6286,9 @@
             <a:r>
               <a:rPr sz="3800" b="1">
                 <a:solidFill>
-                  <a:srgbClr val="1F4D2B"/>
-                </a:solidFill>
-                <a:latin typeface="Georgia"/>
+                  <a:srgbClr val="1B1A17"/>
+                </a:solidFill>
+                <a:latin typeface="Rockwell"/>
               </a:rPr>
               <a:t>Market day</a:t>
             </a:r>
@@ -6310,7 +6310,7 @@
             <a:avLst/>
           </a:prstGeom>
           <a:solidFill>
-            <a:srgbClr val="E2D8C4"/>
+            <a:srgbClr val="2F5D34"/>
           </a:solidFill>
           <a:ln>
             <a:noFill/>
@@ -6369,9 +6369,9 @@
             <a:r>
               <a:rPr sz="3000" b="1">
                 <a:solidFill>
-                  <a:srgbClr val="20190F"/>
-                </a:solidFill>
-                <a:latin typeface="Arial"/>
+                  <a:srgbClr val="1B1A17"/>
+                </a:solidFill>
+                <a:latin typeface="Verdana"/>
               </a:rPr>
               <a:t>•  R200 in the garden tin</a:t>
             </a:r>
@@ -6385,9 +6385,9 @@
             <a:r>
               <a:rPr sz="3000" b="1">
                 <a:solidFill>
-                  <a:srgbClr val="20190F"/>
-                </a:solidFill>
-                <a:latin typeface="Arial"/>
+                  <a:srgbClr val="1B1A17"/>
+                </a:solidFill>
+                <a:latin typeface="Verdana"/>
               </a:rPr>
               <a:t>•  Act out your card</a:t>
             </a:r>
@@ -6401,9 +6401,9 @@
             <a:r>
               <a:rPr sz="3000" b="1">
                 <a:solidFill>
-                  <a:srgbClr val="20190F"/>
-                </a:solidFill>
-                <a:latin typeface="Arial"/>
+                  <a:srgbClr val="1B1A17"/>
+                </a:solidFill>
+                <a:latin typeface="Verdana"/>
               </a:rPr>
               <a:t>•  Move the money between tins</a:t>
             </a:r>
@@ -6425,11 +6425,11 @@
             <a:avLst/>
           </a:prstGeom>
           <a:solidFill>
-            <a:srgbClr val="FBF6EC"/>
+            <a:srgbClr val="EFE6D2"/>
           </a:solidFill>
           <a:ln w="15875">
             <a:solidFill>
-              <a:srgbClr val="E2D8C4"/>
+              <a:srgbClr val="2F5D34"/>
             </a:solidFill>
           </a:ln>
           <a:effectLst/>
@@ -6486,9 +6486,9 @@
             <a:r>
               <a:rPr sz="1200" b="1">
                 <a:solidFill>
-                  <a:srgbClr val="C07A1E"/>
-                </a:solidFill>
-                <a:latin typeface="Arial"/>
+                  <a:srgbClr val="B24E2A"/>
+                </a:solidFill>
+                <a:latin typeface="Verdana"/>
               </a:rPr>
               <a:t>IMAGE · F-IMG-33 · coming</a:t>
             </a:r>
@@ -6525,9 +6525,9 @@
             <a:r>
               <a:rPr sz="1800" b="1">
                 <a:solidFill>
-                  <a:srgbClr val="1F4D2B"/>
-                </a:solidFill>
-                <a:latin typeface="Georgia"/>
+                  <a:srgbClr val="1B1A17"/>
+                </a:solidFill>
+                <a:latin typeface="Rockwell"/>
               </a:rPr>
               <a:t>Market day</a:t>
             </a:r>
@@ -6564,9 +6564,9 @@
             <a:r>
               <a:rPr sz="1100" b="0">
                 <a:solidFill>
-                  <a:srgbClr val="20190F"/>
-                </a:solidFill>
-                <a:latin typeface="Arial"/>
+                  <a:srgbClr val="1B1A17"/>
+                </a:solidFill>
+                <a:latin typeface="Verdana"/>
               </a:rPr>
               <a:t>A small roadside table of bunches of greens and tomatoes; a buyer handing over notes; three tins on the table with house, seedling and savings-pot icons.</a:t>
             </a:r>
@@ -6587,7 +6587,7 @@
     <p:bg>
       <p:bgPr>
         <a:solidFill>
-          <a:srgbClr val="F7F2E9"/>
+          <a:srgbClr val="EFE6D2"/>
         </a:solidFill>
         <a:effectLst/>
       </p:bgPr>
@@ -6629,9 +6629,9 @@
             <a:r>
               <a:rPr sz="1000" b="0">
                 <a:solidFill>
-                  <a:srgbClr val="6B6255"/>
-                </a:solidFill>
-                <a:latin typeface="Arial"/>
+                  <a:srgbClr val="1B1A17"/>
+                </a:solidFill>
+                <a:latin typeface="Verdana"/>
               </a:rPr>
               <a:t>F-D5-13   ·   Poster F-P20</a:t>
             </a:r>
@@ -6668,9 +6668,9 @@
             <a:r>
               <a:rPr sz="1000" b="0">
                 <a:solidFill>
-                  <a:srgbClr val="6B6255"/>
-                </a:solidFill>
-                <a:latin typeface="Arial"/>
+                  <a:srgbClr val="1B1A17"/>
+                </a:solidFill>
+                <a:latin typeface="Verdana"/>
               </a:rPr>
               <a:t>Grow Food, Grow Strong</a:t>
             </a:r>
@@ -6707,9 +6707,9 @@
             <a:r>
               <a:rPr sz="3800" b="1">
                 <a:solidFill>
-                  <a:srgbClr val="1F4D2B"/>
-                </a:solidFill>
-                <a:latin typeface="Georgia"/>
+                  <a:srgbClr val="1B1A17"/>
+                </a:solidFill>
+                <a:latin typeface="Rockwell"/>
               </a:rPr>
               <a:t>Money in, money out</a:t>
             </a:r>
@@ -6731,7 +6731,7 @@
             <a:avLst/>
           </a:prstGeom>
           <a:solidFill>
-            <a:srgbClr val="E2D8C4"/>
+            <a:srgbClr val="2F5D34"/>
           </a:solidFill>
           <a:ln>
             <a:noFill/>
@@ -6790,9 +6790,9 @@
             <a:r>
               <a:rPr sz="2800" b="0">
                 <a:solidFill>
-                  <a:srgbClr val="20190F"/>
-                </a:solidFill>
-                <a:latin typeface="Arial"/>
+                  <a:srgbClr val="1B1A17"/>
+                </a:solidFill>
+                <a:latin typeface="Verdana"/>
               </a:rPr>
               <a:t>•  Date · what · in · out</a:t>
             </a:r>
@@ -6806,9 +6806,9 @@
             <a:r>
               <a:rPr sz="2800" b="0">
                 <a:solidFill>
-                  <a:srgbClr val="20190F"/>
-                </a:solidFill>
-                <a:latin typeface="Arial"/>
+                  <a:srgbClr val="1B1A17"/>
+                </a:solidFill>
+                <a:latin typeface="Verdana"/>
               </a:rPr>
               <a:t>•  Write it the same day</a:t>
             </a:r>
@@ -6854,7 +6854,7 @@
             <a:avLst/>
           </a:prstGeom>
           <a:solidFill>
-            <a:srgbClr val="20190F"/>
+            <a:srgbClr val="1B1A17"/>
           </a:solidFill>
           <a:ln>
             <a:noFill/>
@@ -6913,9 +6913,9 @@
             <a:r>
               <a:rPr sz="1100" b="0">
                 <a:solidFill>
-                  <a:srgbClr val="F7F2E9"/>
-                </a:solidFill>
-                <a:latin typeface="Arial"/>
+                  <a:srgbClr val="EFE6D2"/>
+                </a:solidFill>
+                <a:latin typeface="Verdana"/>
               </a:rPr>
               <a:t>▶  Clip F-ANI-29 · play from the tablet: watch-04-farm-record.mp4</a:t>
             </a:r>
@@ -6936,7 +6936,7 @@
     <p:bg>
       <p:bgPr>
         <a:solidFill>
-          <a:srgbClr val="F7F2E9"/>
+          <a:srgbClr val="EFE6D2"/>
         </a:solidFill>
         <a:effectLst/>
       </p:bgPr>
@@ -6978,9 +6978,9 @@
             <a:r>
               <a:rPr sz="1000" b="0">
                 <a:solidFill>
-                  <a:srgbClr val="6B6255"/>
-                </a:solidFill>
-                <a:latin typeface="Arial"/>
+                  <a:srgbClr val="1B1A17"/>
+                </a:solidFill>
+                <a:latin typeface="Verdana"/>
               </a:rPr>
               <a:t>F-D5-14   ·   Poster F-P20</a:t>
             </a:r>
@@ -7017,9 +7017,9 @@
             <a:r>
               <a:rPr sz="1000" b="0">
                 <a:solidFill>
-                  <a:srgbClr val="6B6255"/>
-                </a:solidFill>
-                <a:latin typeface="Arial"/>
+                  <a:srgbClr val="1B1A17"/>
+                </a:solidFill>
+                <a:latin typeface="Verdana"/>
               </a:rPr>
               <a:t>Grow Food, Grow Strong</a:t>
             </a:r>
@@ -7056,9 +7056,9 @@
             <a:r>
               <a:rPr sz="3800" b="1">
                 <a:solidFill>
-                  <a:srgbClr val="1F4D2B"/>
-                </a:solidFill>
-                <a:latin typeface="Georgia"/>
+                  <a:srgbClr val="1B1A17"/>
+                </a:solidFill>
+                <a:latin typeface="Rockwell"/>
               </a:rPr>
               <a:t>Cost per bunch</a:t>
             </a:r>
@@ -7080,7 +7080,7 @@
             <a:avLst/>
           </a:prstGeom>
           <a:solidFill>
-            <a:srgbClr val="E2D8C4"/>
+            <a:srgbClr val="2F5D34"/>
           </a:solidFill>
           <a:ln>
             <a:noFill/>
@@ -7139,9 +7139,9 @@
             <a:r>
               <a:rPr sz="2400" b="0">
                 <a:solidFill>
-                  <a:srgbClr val="20190F"/>
-                </a:solidFill>
-                <a:latin typeface="Arial"/>
+                  <a:srgbClr val="1B1A17"/>
+                </a:solidFill>
+                <a:latin typeface="Verdana"/>
               </a:rPr>
               <a:t>•  R100 spent ÷ 40 bunches = R2.50</a:t>
             </a:r>
@@ -7155,9 +7155,9 @@
             <a:r>
               <a:rPr sz="2400" b="0">
                 <a:solidFill>
-                  <a:srgbClr val="20190F"/>
-                </a:solidFill>
-                <a:latin typeface="Arial"/>
+                  <a:srgbClr val="1B1A17"/>
+                </a:solidFill>
+                <a:latin typeface="Verdana"/>
               </a:rPr>
               <a:t>•  Shop price? Check locally</a:t>
             </a:r>
@@ -7171,9 +7171,9 @@
             <a:r>
               <a:rPr sz="2400" b="0">
                 <a:solidFill>
-                  <a:srgbClr val="20190F"/>
-                </a:solidFill>
-                <a:latin typeface="Arial"/>
+                  <a:srgbClr val="1B1A17"/>
+                </a:solidFill>
+                <a:latin typeface="Verdana"/>
               </a:rPr>
               <a:t>•  Set a fair price in between</a:t>
             </a:r>
@@ -7195,11 +7195,11 @@
             <a:avLst/>
           </a:prstGeom>
           <a:solidFill>
-            <a:srgbClr val="FBF6EC"/>
+            <a:srgbClr val="EFE6D2"/>
           </a:solidFill>
           <a:ln w="15875">
             <a:solidFill>
-              <a:srgbClr val="E2D8C4"/>
+              <a:srgbClr val="2F5D34"/>
             </a:solidFill>
           </a:ln>
           <a:effectLst/>
@@ -7256,9 +7256,9 @@
             <a:r>
               <a:rPr sz="1200" b="1">
                 <a:solidFill>
-                  <a:srgbClr val="C07A1E"/>
-                </a:solidFill>
-                <a:latin typeface="Arial"/>
+                  <a:srgbClr val="B24E2A"/>
+                </a:solidFill>
+                <a:latin typeface="Verdana"/>
               </a:rPr>
               <a:t>IMAGE · F-IMG-34 · coming</a:t>
             </a:r>
@@ -7295,9 +7295,9 @@
             <a:r>
               <a:rPr sz="1800" b="1">
                 <a:solidFill>
-                  <a:srgbClr val="1F4D2B"/>
-                </a:solidFill>
-                <a:latin typeface="Georgia"/>
+                  <a:srgbClr val="1B1A17"/>
+                </a:solidFill>
+                <a:latin typeface="Rockwell"/>
               </a:rPr>
               <a:t>Cost per bunch</a:t>
             </a:r>
@@ -7334,9 +7334,9 @@
             <a:r>
               <a:rPr sz="1100" b="0">
                 <a:solidFill>
-                  <a:srgbClr val="20190F"/>
-                </a:solidFill>
-                <a:latin typeface="Arial"/>
+                  <a:srgbClr val="1B1A17"/>
+                </a:solidFill>
+                <a:latin typeface="Verdana"/>
               </a:rPr>
               <a:t>Visual sum: a seed packet + a manure bag + a water drop + a taxi → one bed → a row of 40 small bunches.</a:t>
             </a:r>
@@ -7357,7 +7357,7 @@
     <p:bg>
       <p:bgPr>
         <a:solidFill>
-          <a:srgbClr val="F7F2E9"/>
+          <a:srgbClr val="EFE6D2"/>
         </a:solidFill>
         <a:effectLst/>
       </p:bgPr>
@@ -7399,9 +7399,9 @@
             <a:r>
               <a:rPr sz="1000" b="0">
                 <a:solidFill>
-                  <a:srgbClr val="6B6255"/>
-                </a:solidFill>
-                <a:latin typeface="Arial"/>
+                  <a:srgbClr val="1B1A17"/>
+                </a:solidFill>
+                <a:latin typeface="Verdana"/>
               </a:rPr>
               <a:t>F-D5-15   ·   Poster F-P21</a:t>
             </a:r>
@@ -7438,9 +7438,9 @@
             <a:r>
               <a:rPr sz="1000" b="0">
                 <a:solidFill>
-                  <a:srgbClr val="6B6255"/>
-                </a:solidFill>
-                <a:latin typeface="Arial"/>
+                  <a:srgbClr val="1B1A17"/>
+                </a:solidFill>
+                <a:latin typeface="Verdana"/>
               </a:rPr>
               <a:t>Grow Food, Grow Strong</a:t>
             </a:r>
@@ -7477,9 +7477,9 @@
             <a:r>
               <a:rPr sz="3800" b="1">
                 <a:solidFill>
-                  <a:srgbClr val="1F4D2B"/>
-                </a:solidFill>
-                <a:latin typeface="Georgia"/>
+                  <a:srgbClr val="1B1A17"/>
+                </a:solidFill>
+                <a:latin typeface="Rockwell"/>
               </a:rPr>
               <a:t>My next 90 days</a:t>
             </a:r>
@@ -7501,7 +7501,7 @@
             <a:avLst/>
           </a:prstGeom>
           <a:solidFill>
-            <a:srgbClr val="E2D8C4"/>
+            <a:srgbClr val="2F5D34"/>
           </a:solidFill>
           <a:ln>
             <a:noFill/>
@@ -7560,9 +7560,9 @@
             <a:r>
               <a:rPr sz="2400" b="0">
                 <a:solidFill>
-                  <a:srgbClr val="20190F"/>
-                </a:solidFill>
-                <a:latin typeface="Arial"/>
+                  <a:srgbClr val="1B1A17"/>
+                </a:solidFill>
+                <a:latin typeface="Verdana"/>
               </a:rPr>
               <a:t>•  First 2 weeks · by 6 weeks · by 90 days</a:t>
             </a:r>
@@ -7584,11 +7584,11 @@
             <a:avLst/>
           </a:prstGeom>
           <a:solidFill>
-            <a:srgbClr val="FBF6EC"/>
+            <a:srgbClr val="EFE6D2"/>
           </a:solidFill>
           <a:ln w="15875">
             <a:solidFill>
-              <a:srgbClr val="E2D8C4"/>
+              <a:srgbClr val="2F5D34"/>
             </a:solidFill>
           </a:ln>
           <a:effectLst/>
@@ -7645,9 +7645,9 @@
             <a:r>
               <a:rPr sz="1200" b="1">
                 <a:solidFill>
-                  <a:srgbClr val="C07A1E"/>
-                </a:solidFill>
-                <a:latin typeface="Arial"/>
+                  <a:srgbClr val="B24E2A"/>
+                </a:solidFill>
+                <a:latin typeface="Verdana"/>
               </a:rPr>
               <a:t>POSTER ART · F-P21-ART · coming</a:t>
             </a:r>
@@ -7684,9 +7684,9 @@
             <a:r>
               <a:rPr sz="1800" b="1">
                 <a:solidFill>
-                  <a:srgbClr val="1F4D2B"/>
-                </a:solidFill>
-                <a:latin typeface="Georgia"/>
+                  <a:srgbClr val="1B1A17"/>
+                </a:solidFill>
+                <a:latin typeface="Rockwell"/>
               </a:rPr>
               <a:t>Artwork for F-P21 · My 90-day garden plan</a:t>
             </a:r>
@@ -7723,9 +7723,9 @@
             <a:r>
               <a:rPr sz="1100" b="0">
                 <a:solidFill>
-                  <a:srgbClr val="20190F"/>
-                </a:solidFill>
-                <a:latin typeface="Arial"/>
+                  <a:srgbClr val="1B1A17"/>
+                </a:solidFill>
+                <a:latin typeface="Verdana"/>
               </a:rPr>
               <a:t>A path drawn from bottom-left to top-right through three stepping stones. Stone 1: a person mulching and starting a small compost pile beside a tap. Stone 2: the same person digging one bed north of the house and planting seedlings with a spacing stick. Stone 3: the same person harvesting leafy greens into a basket, a jar of seed on the windowsill and a…</a:t>
             </a:r>
@@ -7746,7 +7746,7 @@
     <p:bg>
       <p:bgPr>
         <a:solidFill>
-          <a:srgbClr val="F7F2E9"/>
+          <a:srgbClr val="EFE6D2"/>
         </a:solidFill>
         <a:effectLst/>
       </p:bgPr>
@@ -7788,9 +7788,9 @@
             <a:r>
               <a:rPr sz="1000" b="0">
                 <a:solidFill>
-                  <a:srgbClr val="6B6255"/>
-                </a:solidFill>
-                <a:latin typeface="Arial"/>
+                  <a:srgbClr val="1B1A17"/>
+                </a:solidFill>
+                <a:latin typeface="Verdana"/>
               </a:rPr>
               <a:t>F-D5-16</a:t>
             </a:r>
@@ -7827,9 +7827,9 @@
             <a:r>
               <a:rPr sz="1000" b="0">
                 <a:solidFill>
-                  <a:srgbClr val="6B6255"/>
-                </a:solidFill>
-                <a:latin typeface="Arial"/>
+                  <a:srgbClr val="1B1A17"/>
+                </a:solidFill>
+                <a:latin typeface="Verdana"/>
               </a:rPr>
               <a:t>Grow Food, Grow Strong</a:t>
             </a:r>
@@ -7851,7 +7851,7 @@
             <a:avLst/>
           </a:prstGeom>
           <a:solidFill>
-            <a:srgbClr val="C07A1E"/>
+            <a:srgbClr val="B24E2A"/>
           </a:solidFill>
           <a:ln>
             <a:noFill/>
@@ -7910,9 +7910,9 @@
             <a:r>
               <a:rPr sz="1400" b="1">
                 <a:solidFill>
-                  <a:srgbClr val="F7F2E9"/>
-                </a:solidFill>
-                <a:latin typeface="Arial"/>
+                  <a:srgbClr val="EFE6D2"/>
+                </a:solidFill>
+                <a:latin typeface="Verdana"/>
               </a:rPr>
               <a:t>YOUR TURN</a:t>
             </a:r>
@@ -7949,9 +7949,9 @@
             <a:r>
               <a:rPr sz="3800" b="1">
                 <a:solidFill>
-                  <a:srgbClr val="1F4D2B"/>
-                </a:solidFill>
-                <a:latin typeface="Georgia"/>
+                  <a:srgbClr val="1B1A17"/>
+                </a:solidFill>
+                <a:latin typeface="Rockwell"/>
               </a:rPr>
               <a:t>Show your plan</a:t>
             </a:r>
@@ -7973,7 +7973,7 @@
             <a:avLst/>
           </a:prstGeom>
           <a:solidFill>
-            <a:srgbClr val="E2D8C4"/>
+            <a:srgbClr val="2F5D34"/>
           </a:solidFill>
           <a:ln>
             <a:noFill/>
@@ -8032,9 +8032,9 @@
             <a:r>
               <a:rPr sz="3000" b="1">
                 <a:solidFill>
-                  <a:srgbClr val="20190F"/>
-                </a:solidFill>
-                <a:latin typeface="Arial"/>
+                  <a:srgbClr val="1B1A17"/>
+                </a:solidFill>
+                <a:latin typeface="Verdana"/>
               </a:rPr>
               <a:t>•  2 minutes each to your group</a:t>
             </a:r>
@@ -8048,9 +8048,9 @@
             <a:r>
               <a:rPr sz="3000" b="1">
                 <a:solidFill>
-                  <a:srgbClr val="20190F"/>
-                </a:solidFill>
-                <a:latin typeface="Arial"/>
+                  <a:srgbClr val="1B1A17"/>
+                </a:solidFill>
+                <a:latin typeface="Verdana"/>
               </a:rPr>
               <a:t>•  Two stars and a wish</a:t>
             </a:r>
@@ -8064,9 +8064,9 @@
             <a:r>
               <a:rPr sz="3000" b="1">
                 <a:solidFill>
-                  <a:srgbClr val="20190F"/>
-                </a:solidFill>
-                <a:latin typeface="Arial"/>
+                  <a:srgbClr val="1B1A17"/>
+                </a:solidFill>
+                <a:latin typeface="Verdana"/>
               </a:rPr>
               <a:t>•  Choose your buddy</a:t>
             </a:r>
@@ -8088,11 +8088,11 @@
             <a:avLst/>
           </a:prstGeom>
           <a:solidFill>
-            <a:srgbClr val="FBF6EC"/>
+            <a:srgbClr val="EFE6D2"/>
           </a:solidFill>
           <a:ln w="15875">
             <a:solidFill>
-              <a:srgbClr val="E2D8C4"/>
+              <a:srgbClr val="2F5D34"/>
             </a:solidFill>
           </a:ln>
           <a:effectLst/>
@@ -8149,9 +8149,9 @@
             <a:r>
               <a:rPr sz="1200" b="1">
                 <a:solidFill>
-                  <a:srgbClr val="C07A1E"/>
-                </a:solidFill>
-                <a:latin typeface="Arial"/>
+                  <a:srgbClr val="B24E2A"/>
+                </a:solidFill>
+                <a:latin typeface="Verdana"/>
               </a:rPr>
               <a:t>IMAGE · F-IMG-35 · coming</a:t>
             </a:r>
@@ -8188,9 +8188,9 @@
             <a:r>
               <a:rPr sz="1800" b="1">
                 <a:solidFill>
-                  <a:srgbClr val="1F4D2B"/>
-                </a:solidFill>
-                <a:latin typeface="Georgia"/>
+                  <a:srgbClr val="1B1A17"/>
+                </a:solidFill>
+                <a:latin typeface="Rockwell"/>
               </a:rPr>
               <a:t>Buddies</a:t>
             </a:r>
@@ -8227,9 +8227,9 @@
             <a:r>
               <a:rPr sz="1100" b="0">
                 <a:solidFill>
-                  <a:srgbClr val="20190F"/>
-                </a:solidFill>
-                <a:latin typeface="Arial"/>
+                  <a:srgbClr val="1B1A17"/>
+                </a:solidFill>
+                <a:latin typeface="Verdana"/>
               </a:rPr>
               <a:t>Two learners from the same group shaking hands; one holding a paper plan, the other a basic phone.</a:t>
             </a:r>
@@ -8250,7 +8250,7 @@
     <p:bg>
       <p:bgPr>
         <a:solidFill>
-          <a:srgbClr val="F7F2E9"/>
+          <a:srgbClr val="EFE6D2"/>
         </a:solidFill>
         <a:effectLst/>
       </p:bgPr>
@@ -8292,9 +8292,9 @@
             <a:r>
               <a:rPr sz="1000" b="0">
                 <a:solidFill>
-                  <a:srgbClr val="6B6255"/>
-                </a:solidFill>
-                <a:latin typeface="Arial"/>
+                  <a:srgbClr val="1B1A17"/>
+                </a:solidFill>
+                <a:latin typeface="Verdana"/>
               </a:rPr>
               <a:t>F-D5-17</a:t>
             </a:r>
@@ -8331,9 +8331,9 @@
             <a:r>
               <a:rPr sz="1000" b="0">
                 <a:solidFill>
-                  <a:srgbClr val="6B6255"/>
-                </a:solidFill>
-                <a:latin typeface="Arial"/>
+                  <a:srgbClr val="1B1A17"/>
+                </a:solidFill>
+                <a:latin typeface="Verdana"/>
               </a:rPr>
               <a:t>Grow Food, Grow Strong</a:t>
             </a:r>
@@ -8355,7 +8355,7 @@
             <a:avLst/>
           </a:prstGeom>
           <a:solidFill>
-            <a:srgbClr val="C07A1E"/>
+            <a:srgbClr val="B24E2A"/>
           </a:solidFill>
           <a:ln>
             <a:noFill/>
@@ -8414,9 +8414,9 @@
             <a:r>
               <a:rPr sz="1400" b="1">
                 <a:solidFill>
-                  <a:srgbClr val="F7F2E9"/>
-                </a:solidFill>
-                <a:latin typeface="Arial"/>
+                  <a:srgbClr val="EFE6D2"/>
+                </a:solidFill>
+                <a:latin typeface="Verdana"/>
               </a:rPr>
               <a:t>YOUR TURN</a:t>
             </a:r>
@@ -8453,9 +8453,9 @@
             <a:r>
               <a:rPr sz="3800" b="1">
                 <a:solidFill>
-                  <a:srgbClr val="1F4D2B"/>
-                </a:solidFill>
-                <a:latin typeface="Georgia"/>
+                  <a:srgbClr val="1B1A17"/>
+                </a:solidFill>
+                <a:latin typeface="Rockwell"/>
               </a:rPr>
               <a:t>How did we do?</a:t>
             </a:r>
@@ -8477,7 +8477,7 @@
             <a:avLst/>
           </a:prstGeom>
           <a:solidFill>
-            <a:srgbClr val="E2D8C4"/>
+            <a:srgbClr val="2F5D34"/>
           </a:solidFill>
           <a:ln>
             <a:noFill/>
@@ -8536,9 +8536,9 @@
             <a:r>
               <a:rPr sz="2600" b="1">
                 <a:solidFill>
-                  <a:srgbClr val="20190F"/>
-                </a:solidFill>
-                <a:latin typeface="Arial"/>
+                  <a:srgbClr val="1B1A17"/>
+                </a:solidFill>
+                <a:latin typeface="Verdana"/>
               </a:rPr>
               <a:t>•  Picture quiz again</a:t>
             </a:r>
@@ -8552,9 +8552,9 @@
             <a:r>
               <a:rPr sz="2600" b="1">
                 <a:solidFill>
-                  <a:srgbClr val="20190F"/>
-                </a:solidFill>
-                <a:latin typeface="Arial"/>
+                  <a:srgbClr val="1B1A17"/>
+                </a:solidFill>
+                <a:latin typeface="Verdana"/>
               </a:rPr>
               <a:t>•  Fingers 1 to 5</a:t>
             </a:r>
@@ -8568,9 +8568,9 @@
             <a:r>
               <a:rPr sz="2600" b="1">
                 <a:solidFill>
-                  <a:srgbClr val="20190F"/>
-                </a:solidFill>
-                <a:latin typeface="Arial"/>
+                  <a:srgbClr val="1B1A17"/>
+                </a:solidFill>
+                <a:latin typeface="Verdana"/>
               </a:rPr>
               <a:t>•  Understand best · want to learn more</a:t>
             </a:r>
@@ -8592,11 +8592,11 @@
             <a:avLst/>
           </a:prstGeom>
           <a:solidFill>
-            <a:srgbClr val="FBF6EC"/>
+            <a:srgbClr val="EFE6D2"/>
           </a:solidFill>
           <a:ln w="15875">
             <a:solidFill>
-              <a:srgbClr val="E2D8C4"/>
+              <a:srgbClr val="2F5D34"/>
             </a:solidFill>
           </a:ln>
           <a:effectLst/>
@@ -8653,9 +8653,9 @@
             <a:r>
               <a:rPr sz="1200" b="1">
                 <a:solidFill>
-                  <a:srgbClr val="C07A1E"/>
-                </a:solidFill>
-                <a:latin typeface="Arial"/>
+                  <a:srgbClr val="B24E2A"/>
+                </a:solidFill>
+                <a:latin typeface="Verdana"/>
               </a:rPr>
               <a:t>IMAGE · F-IMG-70 · coming</a:t>
             </a:r>
@@ -8692,9 +8692,9 @@
             <a:r>
               <a:rPr sz="1800" b="1">
                 <a:solidFill>
-                  <a:srgbClr val="1F4D2B"/>
-                </a:solidFill>
-                <a:latin typeface="Georgia"/>
+                  <a:srgbClr val="1B1A17"/>
+                </a:solidFill>
+                <a:latin typeface="Rockwell"/>
               </a:rPr>
               <a:t>Picture quiz card 1</a:t>
             </a:r>
@@ -8731,9 +8731,9 @@
             <a:r>
               <a:rPr sz="1100" b="0">
                 <a:solidFill>
-                  <a:srgbClr val="20190F"/>
-                </a:solidFill>
-                <a:latin typeface="Arial"/>
+                  <a:srgbClr val="1B1A17"/>
+                </a:solidFill>
+                <a:latin typeface="Verdana"/>
               </a:rPr>
               <a:t>Question (said aloud, not printed in the art): 'Where is the sun at midday in winter?' Art: three panels A/B/C: sun to the north of a house (shadow south) · sun to the south · sun straight overhead. Three equal panels with a large A, B and C typeset below each panel in the layout (not in the art).</a:t>
             </a:r>
@@ -8754,7 +8754,7 @@
     <p:bg>
       <p:bgPr>
         <a:solidFill>
-          <a:srgbClr val="1F4D2B"/>
+          <a:srgbClr val="2F5D34"/>
         </a:solidFill>
         <a:effectLst/>
       </p:bgPr>
@@ -8796,9 +8796,9 @@
             <a:r>
               <a:rPr sz="1000" b="0">
                 <a:solidFill>
-                  <a:srgbClr val="A8D88A"/>
-                </a:solidFill>
-                <a:latin typeface="Arial"/>
+                  <a:srgbClr val="EFE6D2"/>
+                </a:solidFill>
+                <a:latin typeface="Verdana"/>
               </a:rPr>
               <a:t>F-D5-18</a:t>
             </a:r>
@@ -8835,9 +8835,9 @@
             <a:r>
               <a:rPr sz="1000" b="0">
                 <a:solidFill>
-                  <a:srgbClr val="A8D88A"/>
-                </a:solidFill>
-                <a:latin typeface="Arial"/>
+                  <a:srgbClr val="EFE6D2"/>
+                </a:solidFill>
+                <a:latin typeface="Verdana"/>
               </a:rPr>
               <a:t>Grow Food, Grow Strong</a:t>
             </a:r>
@@ -8874,9 +8874,9 @@
             <a:r>
               <a:rPr sz="4800" b="1">
                 <a:solidFill>
-                  <a:srgbClr val="F7F2E9"/>
-                </a:solidFill>
-                <a:latin typeface="Georgia"/>
+                  <a:srgbClr val="EFE6D2"/>
+                </a:solidFill>
+                <a:latin typeface="Rockwell"/>
               </a:rPr>
               <a:t>Certificates</a:t>
             </a:r>
@@ -8898,7 +8898,7 @@
             <a:avLst/>
           </a:prstGeom>
           <a:solidFill>
-            <a:srgbClr val="C07A1E"/>
+            <a:srgbClr val="B24E2A"/>
           </a:solidFill>
           <a:ln>
             <a:noFill/>
@@ -8957,9 +8957,9 @@
             <a:r>
               <a:rPr sz="2400" b="0">
                 <a:solidFill>
-                  <a:srgbClr val="A8D88A"/>
-                </a:solidFill>
-                <a:latin typeface="Arial"/>
+                  <a:srgbClr val="EFE6D2"/>
+                </a:solidFill>
+                <a:latin typeface="Verdana"/>
               </a:rPr>
               <a:t>Congratulations</a:t>
             </a:r>
@@ -8981,11 +8981,11 @@
             <a:avLst/>
           </a:prstGeom>
           <a:solidFill>
-            <a:srgbClr val="FBF6EC"/>
+            <a:srgbClr val="EFE6D2"/>
           </a:solidFill>
           <a:ln w="15875">
             <a:solidFill>
-              <a:srgbClr val="E2D8C4"/>
+              <a:srgbClr val="2F5D34"/>
             </a:solidFill>
           </a:ln>
           <a:effectLst/>
@@ -9042,9 +9042,9 @@
             <a:r>
               <a:rPr sz="1200" b="1">
                 <a:solidFill>
-                  <a:srgbClr val="C07A1E"/>
-                </a:solidFill>
-                <a:latin typeface="Arial"/>
+                  <a:srgbClr val="B24E2A"/>
+                </a:solidFill>
+                <a:latin typeface="Verdana"/>
               </a:rPr>
               <a:t>IMAGE · F-IMG-36 · coming</a:t>
             </a:r>
@@ -9081,9 +9081,9 @@
             <a:r>
               <a:rPr sz="1800" b="1">
                 <a:solidFill>
-                  <a:srgbClr val="1F4D2B"/>
-                </a:solidFill>
-                <a:latin typeface="Georgia"/>
+                  <a:srgbClr val="1B1A17"/>
+                </a:solidFill>
+                <a:latin typeface="Rockwell"/>
               </a:rPr>
               <a:t>Certificate</a:t>
             </a:r>
@@ -9120,9 +9120,9 @@
             <a:r>
               <a:rPr sz="1100" b="0">
                 <a:solidFill>
-                  <a:srgbClr val="20190F"/>
-                </a:solidFill>
-                <a:latin typeface="Arial"/>
+                  <a:srgbClr val="1B1A17"/>
+                </a:solidFill>
+                <a:latin typeface="Verdana"/>
               </a:rPr>
               <a:t>A facilitator handing a certificate to a smiling older woman in her Sunday best; group applauding behind.</a:t>
             </a:r>
@@ -9143,7 +9143,7 @@
     <p:bg>
       <p:bgPr>
         <a:solidFill>
-          <a:srgbClr val="F7F2E9"/>
+          <a:srgbClr val="EFE6D2"/>
         </a:solidFill>
         <a:effectLst/>
       </p:bgPr>
@@ -9185,9 +9185,9 @@
             <a:r>
               <a:rPr sz="1000" b="0">
                 <a:solidFill>
-                  <a:srgbClr val="6B6255"/>
-                </a:solidFill>
-                <a:latin typeface="Arial"/>
+                  <a:srgbClr val="1B1A17"/>
+                </a:solidFill>
+                <a:latin typeface="Verdana"/>
               </a:rPr>
               <a:t>F-D5-19</a:t>
             </a:r>
@@ -9224,9 +9224,9 @@
             <a:r>
               <a:rPr sz="1000" b="0">
                 <a:solidFill>
-                  <a:srgbClr val="6B6255"/>
-                </a:solidFill>
-                <a:latin typeface="Arial"/>
+                  <a:srgbClr val="1B1A17"/>
+                </a:solidFill>
+                <a:latin typeface="Verdana"/>
               </a:rPr>
               <a:t>Grow Food, Grow Strong</a:t>
             </a:r>
@@ -9263,9 +9263,9 @@
             <a:r>
               <a:rPr sz="3800" b="1">
                 <a:solidFill>
-                  <a:srgbClr val="1F4D2B"/>
-                </a:solidFill>
-                <a:latin typeface="Georgia"/>
+                  <a:srgbClr val="1B1A17"/>
+                </a:solidFill>
+                <a:latin typeface="Rockwell"/>
               </a:rPr>
               <a:t>Go well</a:t>
             </a:r>
@@ -9287,7 +9287,7 @@
             <a:avLst/>
           </a:prstGeom>
           <a:solidFill>
-            <a:srgbClr val="E2D8C4"/>
+            <a:srgbClr val="2F5D34"/>
           </a:solidFill>
           <a:ln>
             <a:noFill/>
@@ -9346,9 +9346,9 @@
             <a:r>
               <a:rPr sz="2400" b="0">
                 <a:solidFill>
-                  <a:srgbClr val="20190F"/>
-                </a:solidFill>
-                <a:latin typeface="Arial"/>
+                  <a:srgbClr val="1B1A17"/>
+                </a:solidFill>
+                <a:latin typeface="Verdana"/>
               </a:rPr>
               <a:t>•  Your mentor visits within 2 weeks</a:t>
             </a:r>
@@ -9362,9 +9362,9 @@
             <a:r>
               <a:rPr sz="2400" b="0">
                 <a:solidFill>
-                  <a:srgbClr val="20190F"/>
-                </a:solidFill>
-                <a:latin typeface="Arial"/>
+                  <a:srgbClr val="1B1A17"/>
+                </a:solidFill>
+                <a:latin typeface="Verdana"/>
               </a:rPr>
               <a:t>•  Your buddy will call you</a:t>
             </a:r>
@@ -9378,9 +9378,9 @@
             <a:r>
               <a:rPr sz="2400" b="0">
                 <a:solidFill>
-                  <a:srgbClr val="20190F"/>
-                </a:solidFill>
-                <a:latin typeface="Arial"/>
+                  <a:srgbClr val="1B1A17"/>
+                </a:solidFill>
+                <a:latin typeface="Verdana"/>
               </a:rPr>
               <a:t>•  Look after our garden</a:t>
             </a:r>
@@ -9402,11 +9402,11 @@
             <a:avLst/>
           </a:prstGeom>
           <a:solidFill>
-            <a:srgbClr val="FBF6EC"/>
+            <a:srgbClr val="EFE6D2"/>
           </a:solidFill>
           <a:ln w="15875">
             <a:solidFill>
-              <a:srgbClr val="E2D8C4"/>
+              <a:srgbClr val="2F5D34"/>
             </a:solidFill>
           </a:ln>
           <a:effectLst/>
@@ -9463,9 +9463,9 @@
             <a:r>
               <a:rPr sz="1200" b="1">
                 <a:solidFill>
-                  <a:srgbClr val="C07A1E"/>
-                </a:solidFill>
-                <a:latin typeface="Arial"/>
+                  <a:srgbClr val="B24E2A"/>
+                </a:solidFill>
+                <a:latin typeface="Verdana"/>
               </a:rPr>
               <a:t>IMAGE · F-IMG-37 · coming</a:t>
             </a:r>
@@ -9502,9 +9502,9 @@
             <a:r>
               <a:rPr sz="1800" b="1">
                 <a:solidFill>
-                  <a:srgbClr val="1F4D2B"/>
-                </a:solidFill>
-                <a:latin typeface="Georgia"/>
+                  <a:srgbClr val="1B1A17"/>
+                </a:solidFill>
+                <a:latin typeface="Rockwell"/>
               </a:rPr>
               <a:t>Go well</a:t>
             </a:r>
@@ -9541,9 +9541,9 @@
             <a:r>
               <a:rPr sz="1100" b="0">
                 <a:solidFill>
-                  <a:srgbClr val="20190F"/>
-                </a:solidFill>
-                <a:latin typeface="Arial"/>
+                  <a:srgbClr val="1B1A17"/>
+                </a:solidFill>
+                <a:latin typeface="Verdana"/>
               </a:rPr>
               <a:t>The course garden at dusk: planted beds, compost heaps, the young fruit tree, the swale mound — a few people walking home along the path with seedling trays.</a:t>
             </a:r>
@@ -9564,7 +9564,7 @@
     <p:bg>
       <p:bgPr>
         <a:solidFill>
-          <a:srgbClr val="F7F2E9"/>
+          <a:srgbClr val="EFE6D2"/>
         </a:solidFill>
         <a:effectLst/>
       </p:bgPr>
@@ -9606,9 +9606,9 @@
             <a:r>
               <a:rPr sz="1000" b="0">
                 <a:solidFill>
-                  <a:srgbClr val="6B6255"/>
-                </a:solidFill>
-                <a:latin typeface="Arial"/>
+                  <a:srgbClr val="1B1A17"/>
+                </a:solidFill>
+                <a:latin typeface="Verdana"/>
               </a:rPr>
               <a:t>F-D5-02   ·   Poster F-P18</a:t>
             </a:r>
@@ -9645,9 +9645,9 @@
             <a:r>
               <a:rPr sz="1000" b="0">
                 <a:solidFill>
-                  <a:srgbClr val="6B6255"/>
-                </a:solidFill>
-                <a:latin typeface="Arial"/>
+                  <a:srgbClr val="1B1A17"/>
+                </a:solidFill>
+                <a:latin typeface="Verdana"/>
               </a:rPr>
               <a:t>Grow Food, Grow Strong</a:t>
             </a:r>
@@ -9684,9 +9684,9 @@
             <a:r>
               <a:rPr sz="3800" b="1">
                 <a:solidFill>
-                  <a:srgbClr val="1F4D2B"/>
-                </a:solidFill>
-                <a:latin typeface="Georgia"/>
+                  <a:srgbClr val="1B1A17"/>
+                </a:solidFill>
+                <a:latin typeface="Rockwell"/>
               </a:rPr>
               <a:t>Where does your seed come from?</a:t>
             </a:r>
@@ -9708,7 +9708,7 @@
             <a:avLst/>
           </a:prstGeom>
           <a:solidFill>
-            <a:srgbClr val="E2D8C4"/>
+            <a:srgbClr val="2F5D34"/>
           </a:solidFill>
           <a:ln>
             <a:noFill/>
@@ -9767,9 +9767,9 @@
             <a:r>
               <a:rPr sz="2400" b="0">
                 <a:solidFill>
-                  <a:srgbClr val="20190F"/>
-                </a:solidFill>
-                <a:latin typeface="Arial"/>
+                  <a:srgbClr val="1B1A17"/>
+                </a:solidFill>
+                <a:latin typeface="Verdana"/>
               </a:rPr>
               <a:t>•  Open-pollinated: save it for ever</a:t>
             </a:r>
@@ -9783,9 +9783,9 @@
             <a:r>
               <a:rPr sz="2400" b="0">
                 <a:solidFill>
-                  <a:srgbClr val="20190F"/>
-                </a:solidFill>
-                <a:latin typeface="Arial"/>
+                  <a:srgbClr val="1B1A17"/>
+                </a:solidFill>
+                <a:latin typeface="Verdana"/>
               </a:rPr>
               <a:t>•  Hybrid (F1): don't save it</a:t>
             </a:r>
@@ -9799,9 +9799,9 @@
             <a:r>
               <a:rPr sz="2400" b="0">
                 <a:solidFill>
-                  <a:srgbClr val="20190F"/>
-                </a:solidFill>
-                <a:latin typeface="Arial"/>
+                  <a:srgbClr val="1B1A17"/>
+                </a:solidFill>
+                <a:latin typeface="Verdana"/>
               </a:rPr>
               <a:t>•  Treated seed is poison</a:t>
             </a:r>
@@ -9823,11 +9823,11 @@
             <a:avLst/>
           </a:prstGeom>
           <a:solidFill>
-            <a:srgbClr val="FBF6EC"/>
+            <a:srgbClr val="EFE6D2"/>
           </a:solidFill>
           <a:ln w="15875">
             <a:solidFill>
-              <a:srgbClr val="E2D8C4"/>
+              <a:srgbClr val="2F5D34"/>
             </a:solidFill>
           </a:ln>
           <a:effectLst/>
@@ -9884,9 +9884,9 @@
             <a:r>
               <a:rPr sz="1200" b="1">
                 <a:solidFill>
-                  <a:srgbClr val="C07A1E"/>
-                </a:solidFill>
-                <a:latin typeface="Arial"/>
+                  <a:srgbClr val="B24E2A"/>
+                </a:solidFill>
+                <a:latin typeface="Verdana"/>
               </a:rPr>
               <a:t>POSTER ART · F-P18-ART · coming</a:t>
             </a:r>
@@ -9923,9 +9923,9 @@
             <a:r>
               <a:rPr sz="1800" b="1">
                 <a:solidFill>
-                  <a:srgbClr val="1F4D2B"/>
-                </a:solidFill>
-                <a:latin typeface="Georgia"/>
+                  <a:srgbClr val="1B1A17"/>
+                </a:solidFill>
+                <a:latin typeface="Rockwell"/>
               </a:rPr>
               <a:t>Artwork for F-P18 · Save your seed</a:t>
             </a:r>
@@ -9962,9 +9962,9 @@
             <a:r>
               <a:rPr sz="1100" b="0">
                 <a:solidFill>
-                  <a:srgbClr val="20190F"/>
-                </a:solidFill>
-                <a:latin typeface="Arial"/>
+                  <a:srgbClr val="1B1A17"/>
+                </a:solidFill>
+                <a:latin typeface="Verdana"/>
               </a:rPr>
               <a:t>Top: two seed packets. Left packet leads to three generations of similar healthy plants (open-pollinated); right packet (marked with a small generic "F1" style badge shape — no letters, use a distinct symbol like a double circle) leads to one good plant then mixed, uneven small plants. Middle left: dry bean pods rattling on the plant, hands shelling, a…</a:t>
             </a:r>
@@ -9985,7 +9985,7 @@
     <p:bg>
       <p:bgPr>
         <a:solidFill>
-          <a:srgbClr val="F7F2E9"/>
+          <a:srgbClr val="EFE6D2"/>
         </a:solidFill>
         <a:effectLst/>
       </p:bgPr>
@@ -10027,9 +10027,9 @@
             <a:r>
               <a:rPr sz="1000" b="0">
                 <a:solidFill>
-                  <a:srgbClr val="6B6255"/>
-                </a:solidFill>
-                <a:latin typeface="Arial"/>
+                  <a:srgbClr val="1B1A17"/>
+                </a:solidFill>
+                <a:latin typeface="Verdana"/>
               </a:rPr>
               <a:t>F-D5-03   ·   Poster F-P18</a:t>
             </a:r>
@@ -10066,9 +10066,9 @@
             <a:r>
               <a:rPr sz="1000" b="0">
                 <a:solidFill>
-                  <a:srgbClr val="6B6255"/>
-                </a:solidFill>
-                <a:latin typeface="Arial"/>
+                  <a:srgbClr val="1B1A17"/>
+                </a:solidFill>
+                <a:latin typeface="Verdana"/>
               </a:rPr>
               <a:t>Grow Food, Grow Strong</a:t>
             </a:r>
@@ -10105,9 +10105,9 @@
             <a:r>
               <a:rPr sz="3800" b="1">
                 <a:solidFill>
-                  <a:srgbClr val="1F4D2B"/>
-                </a:solidFill>
-                <a:latin typeface="Georgia"/>
+                  <a:srgbClr val="1B1A17"/>
+                </a:solidFill>
+                <a:latin typeface="Rockwell"/>
               </a:rPr>
               <a:t>Choose the parents</a:t>
             </a:r>
@@ -10129,7 +10129,7 @@
             <a:avLst/>
           </a:prstGeom>
           <a:solidFill>
-            <a:srgbClr val="E2D8C4"/>
+            <a:srgbClr val="2F5D34"/>
           </a:solidFill>
           <a:ln>
             <a:noFill/>
@@ -10188,9 +10188,9 @@
             <a:r>
               <a:rPr sz="2800" b="0">
                 <a:solidFill>
-                  <a:srgbClr val="20190F"/>
-                </a:solidFill>
-                <a:latin typeface="Arial"/>
+                  <a:srgbClr val="1B1A17"/>
+                </a:solidFill>
+                <a:latin typeface="Verdana"/>
               </a:rPr>
               <a:t>•  The best plants · many plants</a:t>
             </a:r>
@@ -10204,9 +10204,9 @@
             <a:r>
               <a:rPr sz="2800" b="0">
                 <a:solidFill>
-                  <a:srgbClr val="20190F"/>
-                </a:solidFill>
-                <a:latin typeface="Arial"/>
+                  <a:srgbClr val="1B1A17"/>
+                </a:solidFill>
+                <a:latin typeface="Verdana"/>
               </a:rPr>
               <a:t>•  Never the first to bolt</a:t>
             </a:r>
@@ -10252,7 +10252,7 @@
             <a:avLst/>
           </a:prstGeom>
           <a:solidFill>
-            <a:srgbClr val="20190F"/>
+            <a:srgbClr val="1B1A17"/>
           </a:solidFill>
           <a:ln>
             <a:noFill/>
@@ -10311,9 +10311,9 @@
             <a:r>
               <a:rPr sz="1100" b="0">
                 <a:solidFill>
-                  <a:srgbClr val="F7F2E9"/>
-                </a:solidFill>
-                <a:latin typeface="Arial"/>
+                  <a:srgbClr val="EFE6D2"/>
+                </a:solidFill>
+                <a:latin typeface="Verdana"/>
               </a:rPr>
               <a:t>▶  Clip F-ANI-24 · play from the tablet: seed-selecting-parents.mp4</a:t>
             </a:r>
@@ -10334,7 +10334,7 @@
     <p:bg>
       <p:bgPr>
         <a:solidFill>
-          <a:srgbClr val="F7F2E9"/>
+          <a:srgbClr val="EFE6D2"/>
         </a:solidFill>
         <a:effectLst/>
       </p:bgPr>
@@ -10376,9 +10376,9 @@
             <a:r>
               <a:rPr sz="1000" b="0">
                 <a:solidFill>
-                  <a:srgbClr val="6B6255"/>
-                </a:solidFill>
-                <a:latin typeface="Arial"/>
+                  <a:srgbClr val="1B1A17"/>
+                </a:solidFill>
+                <a:latin typeface="Verdana"/>
               </a:rPr>
               <a:t>F-D5-04   ·   Poster F-P18</a:t>
             </a:r>
@@ -10415,9 +10415,9 @@
             <a:r>
               <a:rPr sz="1000" b="0">
                 <a:solidFill>
-                  <a:srgbClr val="6B6255"/>
-                </a:solidFill>
-                <a:latin typeface="Arial"/>
+                  <a:srgbClr val="1B1A17"/>
+                </a:solidFill>
+                <a:latin typeface="Verdana"/>
               </a:rPr>
               <a:t>Grow Food, Grow Strong</a:t>
             </a:r>
@@ -10439,7 +10439,7 @@
             <a:avLst/>
           </a:prstGeom>
           <a:solidFill>
-            <a:srgbClr val="C07A1E"/>
+            <a:srgbClr val="B24E2A"/>
           </a:solidFill>
           <a:ln>
             <a:noFill/>
@@ -10498,9 +10498,9 @@
             <a:r>
               <a:rPr sz="1400" b="1">
                 <a:solidFill>
-                  <a:srgbClr val="F7F2E9"/>
-                </a:solidFill>
-                <a:latin typeface="Arial"/>
+                  <a:srgbClr val="EFE6D2"/>
+                </a:solidFill>
+                <a:latin typeface="Verdana"/>
               </a:rPr>
               <a:t>YOUR TURN</a:t>
             </a:r>
@@ -10537,9 +10537,9 @@
             <a:r>
               <a:rPr sz="3800" b="1">
                 <a:solidFill>
-                  <a:srgbClr val="1F4D2B"/>
-                </a:solidFill>
-                <a:latin typeface="Georgia"/>
+                  <a:srgbClr val="1B1A17"/>
+                </a:solidFill>
+                <a:latin typeface="Rockwell"/>
               </a:rPr>
               <a:t>Dry method</a:t>
             </a:r>
@@ -10561,7 +10561,7 @@
             <a:avLst/>
           </a:prstGeom>
           <a:solidFill>
-            <a:srgbClr val="E2D8C4"/>
+            <a:srgbClr val="2F5D34"/>
           </a:solidFill>
           <a:ln>
             <a:noFill/>
@@ -10620,9 +10620,9 @@
             <a:r>
               <a:rPr sz="2600" b="1">
                 <a:solidFill>
-                  <a:srgbClr val="20190F"/>
-                </a:solidFill>
-                <a:latin typeface="Arial"/>
+                  <a:srgbClr val="1B1A17"/>
+                </a:solidFill>
+                <a:latin typeface="Verdana"/>
               </a:rPr>
               <a:t>•  Dry on the plant until it rattles</a:t>
             </a:r>
@@ -10636,9 +10636,9 @@
             <a:r>
               <a:rPr sz="2600" b="1">
                 <a:solidFill>
-                  <a:srgbClr val="20190F"/>
-                </a:solidFill>
-                <a:latin typeface="Arial"/>
+                  <a:srgbClr val="1B1A17"/>
+                </a:solidFill>
+                <a:latin typeface="Verdana"/>
               </a:rPr>
               <a:t>•  Dry is when it snaps</a:t>
             </a:r>
@@ -10684,7 +10684,7 @@
             <a:avLst/>
           </a:prstGeom>
           <a:solidFill>
-            <a:srgbClr val="20190F"/>
+            <a:srgbClr val="1B1A17"/>
           </a:solidFill>
           <a:ln>
             <a:noFill/>
@@ -10743,9 +10743,9 @@
             <a:r>
               <a:rPr sz="1100" b="0">
                 <a:solidFill>
-                  <a:srgbClr val="F7F2E9"/>
-                </a:solidFill>
-                <a:latin typeface="Arial"/>
+                  <a:srgbClr val="EFE6D2"/>
+                </a:solidFill>
+                <a:latin typeface="Verdana"/>
               </a:rPr>
               <a:t>▶  Clip F-ANI-25 · play from the tablet: seed-dry-processing.mp4</a:t>
             </a:r>
@@ -10766,7 +10766,7 @@
     <p:bg>
       <p:bgPr>
         <a:solidFill>
-          <a:srgbClr val="F7F2E9"/>
+          <a:srgbClr val="EFE6D2"/>
         </a:solidFill>
         <a:effectLst/>
       </p:bgPr>
@@ -10808,9 +10808,9 @@
             <a:r>
               <a:rPr sz="1000" b="0">
                 <a:solidFill>
-                  <a:srgbClr val="6B6255"/>
-                </a:solidFill>
-                <a:latin typeface="Arial"/>
+                  <a:srgbClr val="1B1A17"/>
+                </a:solidFill>
+                <a:latin typeface="Verdana"/>
               </a:rPr>
               <a:t>F-D5-05   ·   Poster F-P18</a:t>
             </a:r>
@@ -10847,9 +10847,9 @@
             <a:r>
               <a:rPr sz="1000" b="0">
                 <a:solidFill>
-                  <a:srgbClr val="6B6255"/>
-                </a:solidFill>
-                <a:latin typeface="Arial"/>
+                  <a:srgbClr val="1B1A17"/>
+                </a:solidFill>
+                <a:latin typeface="Verdana"/>
               </a:rPr>
               <a:t>Grow Food, Grow Strong</a:t>
             </a:r>
@@ -10871,7 +10871,7 @@
             <a:avLst/>
           </a:prstGeom>
           <a:solidFill>
-            <a:srgbClr val="C07A1E"/>
+            <a:srgbClr val="B24E2A"/>
           </a:solidFill>
           <a:ln>
             <a:noFill/>
@@ -10930,9 +10930,9 @@
             <a:r>
               <a:rPr sz="1400" b="1">
                 <a:solidFill>
-                  <a:srgbClr val="F7F2E9"/>
-                </a:solidFill>
-                <a:latin typeface="Arial"/>
+                  <a:srgbClr val="EFE6D2"/>
+                </a:solidFill>
+                <a:latin typeface="Verdana"/>
               </a:rPr>
               <a:t>YOUR TURN</a:t>
             </a:r>
@@ -10969,9 +10969,9 @@
             <a:r>
               <a:rPr sz="3800" b="1">
                 <a:solidFill>
-                  <a:srgbClr val="1F4D2B"/>
-                </a:solidFill>
-                <a:latin typeface="Georgia"/>
+                  <a:srgbClr val="1B1A17"/>
+                </a:solidFill>
+                <a:latin typeface="Rockwell"/>
               </a:rPr>
               <a:t>Wet method</a:t>
             </a:r>
@@ -10993,7 +10993,7 @@
             <a:avLst/>
           </a:prstGeom>
           <a:solidFill>
-            <a:srgbClr val="E2D8C4"/>
+            <a:srgbClr val="2F5D34"/>
           </a:solidFill>
           <a:ln>
             <a:noFill/>
@@ -11052,9 +11052,9 @@
             <a:r>
               <a:rPr sz="3000" b="1">
                 <a:solidFill>
-                  <a:srgbClr val="20190F"/>
-                </a:solidFill>
-                <a:latin typeface="Arial"/>
+                  <a:srgbClr val="1B1A17"/>
+                </a:solidFill>
+                <a:latin typeface="Verdana"/>
               </a:rPr>
               <a:t>•  Tomato seed in a jar, 2–3 days</a:t>
             </a:r>
@@ -11068,9 +11068,9 @@
             <a:r>
               <a:rPr sz="3000" b="1">
                 <a:solidFill>
-                  <a:srgbClr val="20190F"/>
-                </a:solidFill>
-                <a:latin typeface="Arial"/>
+                  <a:srgbClr val="1B1A17"/>
+                </a:solidFill>
+                <a:latin typeface="Verdana"/>
               </a:rPr>
               <a:t>•  Rinse · dry thin in the shade</a:t>
             </a:r>
@@ -11092,11 +11092,11 @@
             <a:avLst/>
           </a:prstGeom>
           <a:solidFill>
-            <a:srgbClr val="FBF6EC"/>
+            <a:srgbClr val="EFE6D2"/>
           </a:solidFill>
           <a:ln w="15875">
             <a:solidFill>
-              <a:srgbClr val="E2D8C4"/>
+              <a:srgbClr val="2F5D34"/>
             </a:solidFill>
           </a:ln>
           <a:effectLst/>
@@ -11153,9 +11153,9 @@
             <a:r>
               <a:rPr sz="1200" b="1">
                 <a:solidFill>
-                  <a:srgbClr val="C07A1E"/>
-                </a:solidFill>
-                <a:latin typeface="Arial"/>
+                  <a:srgbClr val="B24E2A"/>
+                </a:solidFill>
+                <a:latin typeface="Verdana"/>
               </a:rPr>
               <a:t>ANIMATION · F-ANI-27 · coming</a:t>
             </a:r>
@@ -11192,9 +11192,9 @@
             <a:r>
               <a:rPr sz="1800" b="1">
                 <a:solidFill>
-                  <a:srgbClr val="1F4D2B"/>
-                </a:solidFill>
-                <a:latin typeface="Georgia"/>
+                  <a:srgbClr val="1B1A17"/>
+                </a:solidFill>
+                <a:latin typeface="Rockwell"/>
               </a:rPr>
               <a:t>Tomato seed ferment</a:t>
             </a:r>
@@ -11231,9 +11231,9 @@
             <a:r>
               <a:rPr sz="1100" b="0">
                 <a:solidFill>
-                  <a:srgbClr val="20190F"/>
-                </a:solidFill>
-                <a:latin typeface="Arial"/>
+                  <a:srgbClr val="1B1A17"/>
+                </a:solidFill>
+                <a:latin typeface="Verdana"/>
               </a:rPr>
               <a:t>A ripe tomato cut in half; seeds and jelly scooped with a spoon into a small glass jar; a little water added; cloth tied over the top. Sun/moon icons cycle 3 times; a thin white skin forms on the surface. The skin and floating seeds are poured off; the heavy seeds at the bottom are tipped into a sieve and rinsed under a stream from a jug; then spread…</a:t>
             </a:r>
@@ -11254,7 +11254,7 @@
     <p:bg>
       <p:bgPr>
         <a:solidFill>
-          <a:srgbClr val="F7F2E9"/>
+          <a:srgbClr val="EFE6D2"/>
         </a:solidFill>
         <a:effectLst/>
       </p:bgPr>
@@ -11296,9 +11296,9 @@
             <a:r>
               <a:rPr sz="1000" b="0">
                 <a:solidFill>
-                  <a:srgbClr val="6B6255"/>
-                </a:solidFill>
-                <a:latin typeface="Arial"/>
+                  <a:srgbClr val="1B1A17"/>
+                </a:solidFill>
+                <a:latin typeface="Verdana"/>
               </a:rPr>
               <a:t>F-D5-06   ·   Poster F-P18</a:t>
             </a:r>
@@ -11335,9 +11335,9 @@
             <a:r>
               <a:rPr sz="1000" b="0">
                 <a:solidFill>
-                  <a:srgbClr val="6B6255"/>
-                </a:solidFill>
-                <a:latin typeface="Arial"/>
+                  <a:srgbClr val="1B1A17"/>
+                </a:solidFill>
+                <a:latin typeface="Verdana"/>
               </a:rPr>
               <a:t>Grow Food, Grow Strong</a:t>
             </a:r>
@@ -11374,9 +11374,9 @@
             <a:r>
               <a:rPr sz="3800" b="1">
                 <a:solidFill>
-                  <a:srgbClr val="1F4D2B"/>
-                </a:solidFill>
-                <a:latin typeface="Georgia"/>
+                  <a:srgbClr val="1B1A17"/>
+                </a:solidFill>
+                <a:latin typeface="Rockwell"/>
               </a:rPr>
               <a:t>Store and test</a:t>
             </a:r>
@@ -11398,7 +11398,7 @@
             <a:avLst/>
           </a:prstGeom>
           <a:solidFill>
-            <a:srgbClr val="E2D8C4"/>
+            <a:srgbClr val="2F5D34"/>
           </a:solidFill>
           <a:ln>
             <a:noFill/>
@@ -11457,9 +11457,9 @@
             <a:r>
               <a:rPr sz="2800" b="0">
                 <a:solidFill>
-                  <a:srgbClr val="20190F"/>
-                </a:solidFill>
-                <a:latin typeface="Arial"/>
+                  <a:srgbClr val="1B1A17"/>
+                </a:solidFill>
+                <a:latin typeface="Verdana"/>
               </a:rPr>
               <a:t>•  Cool · dark · dry · labelled</a:t>
             </a:r>
@@ -11473,9 +11473,9 @@
             <a:r>
               <a:rPr sz="2800" b="0">
                 <a:solidFill>
-                  <a:srgbClr val="20190F"/>
-                </a:solidFill>
-                <a:latin typeface="Arial"/>
+                  <a:srgbClr val="1B1A17"/>
+                </a:solidFill>
+                <a:latin typeface="Verdana"/>
               </a:rPr>
               <a:t>•  10 seeds on a damp cloth</a:t>
             </a:r>
@@ -11489,9 +11489,9 @@
             <a:r>
               <a:rPr sz="2800" b="0">
                 <a:solidFill>
-                  <a:srgbClr val="20190F"/>
-                </a:solidFill>
-                <a:latin typeface="Arial"/>
+                  <a:srgbClr val="1B1A17"/>
+                </a:solidFill>
+                <a:latin typeface="Verdana"/>
               </a:rPr>
               <a:t>•  8 sprout = good seed</a:t>
             </a:r>
@@ -11537,7 +11537,7 @@
             <a:avLst/>
           </a:prstGeom>
           <a:solidFill>
-            <a:srgbClr val="20190F"/>
+            <a:srgbClr val="1B1A17"/>
           </a:solidFill>
           <a:ln>
             <a:noFill/>
@@ -11596,9 +11596,9 @@
             <a:r>
               <a:rPr sz="1100" b="0">
                 <a:solidFill>
-                  <a:srgbClr val="F7F2E9"/>
-                </a:solidFill>
-                <a:latin typeface="Arial"/>
+                  <a:srgbClr val="EFE6D2"/>
+                </a:solidFill>
+                <a:latin typeface="Verdana"/>
               </a:rPr>
               <a:t>▶  Clip F-ANI-26 · play from the tablet: new_seed-storage-jar-vs-bag.mp4</a:t>
             </a:r>
@@ -11619,7 +11619,7 @@
     <p:bg>
       <p:bgPr>
         <a:solidFill>
-          <a:srgbClr val="F7F2E9"/>
+          <a:srgbClr val="EFE6D2"/>
         </a:solidFill>
         <a:effectLst/>
       </p:bgPr>
@@ -11661,9 +11661,9 @@
             <a:r>
               <a:rPr sz="1000" b="0">
                 <a:solidFill>
-                  <a:srgbClr val="6B6255"/>
-                </a:solidFill>
-                <a:latin typeface="Arial"/>
+                  <a:srgbClr val="1B1A17"/>
+                </a:solidFill>
+                <a:latin typeface="Verdana"/>
               </a:rPr>
               <a:t>F-D5-07   ·   Poster F-P19</a:t>
             </a:r>
@@ -11700,9 +11700,9 @@
             <a:r>
               <a:rPr sz="1000" b="0">
                 <a:solidFill>
-                  <a:srgbClr val="6B6255"/>
-                </a:solidFill>
-                <a:latin typeface="Arial"/>
+                  <a:srgbClr val="1B1A17"/>
+                </a:solidFill>
+                <a:latin typeface="Verdana"/>
               </a:rPr>
               <a:t>Grow Food, Grow Strong</a:t>
             </a:r>
@@ -11739,9 +11739,9 @@
             <a:r>
               <a:rPr sz="3800" b="1">
                 <a:solidFill>
-                  <a:srgbClr val="1F4D2B"/>
-                </a:solidFill>
-                <a:latin typeface="Georgia"/>
+                  <a:srgbClr val="1B1A17"/>
+                </a:solidFill>
+                <a:latin typeface="Rockwell"/>
               </a:rPr>
               <a:t>The family plate</a:t>
             </a:r>
@@ -11763,7 +11763,7 @@
             <a:avLst/>
           </a:prstGeom>
           <a:solidFill>
-            <a:srgbClr val="E2D8C4"/>
+            <a:srgbClr val="2F5D34"/>
           </a:solidFill>
           <a:ln>
             <a:noFill/>
@@ -11822,9 +11822,9 @@
             <a:r>
               <a:rPr sz="2400" b="0">
                 <a:solidFill>
-                  <a:srgbClr val="20190F"/>
-                </a:solidFill>
-                <a:latin typeface="Arial"/>
+                  <a:srgbClr val="1B1A17"/>
+                </a:solidFill>
+                <a:latin typeface="Verdana"/>
               </a:rPr>
               <a:t>•  Half vegetables and fruit</a:t>
             </a:r>
@@ -11838,9 +11838,9 @@
             <a:r>
               <a:rPr sz="2400" b="0">
                 <a:solidFill>
-                  <a:srgbClr val="20190F"/>
-                </a:solidFill>
-                <a:latin typeface="Arial"/>
+                  <a:srgbClr val="1B1A17"/>
+                </a:solidFill>
+                <a:latin typeface="Verdana"/>
               </a:rPr>
               <a:t>•  Quarter starch · quarter beans, eggs, meat</a:t>
             </a:r>
@@ -11862,11 +11862,11 @@
             <a:avLst/>
           </a:prstGeom>
           <a:solidFill>
-            <a:srgbClr val="FBF6EC"/>
+            <a:srgbClr val="EFE6D2"/>
           </a:solidFill>
           <a:ln w="15875">
             <a:solidFill>
-              <a:srgbClr val="E2D8C4"/>
+              <a:srgbClr val="2F5D34"/>
             </a:solidFill>
           </a:ln>
           <a:effectLst/>
@@ -11923,9 +11923,9 @@
             <a:r>
               <a:rPr sz="1200" b="1">
                 <a:solidFill>
-                  <a:srgbClr val="C07A1E"/>
-                </a:solidFill>
-                <a:latin typeface="Arial"/>
+                  <a:srgbClr val="B24E2A"/>
+                </a:solidFill>
+                <a:latin typeface="Verdana"/>
               </a:rPr>
               <a:t>POSTER ART · F-P19-ART · coming</a:t>
             </a:r>
@@ -11962,9 +11962,9 @@
             <a:r>
               <a:rPr sz="1800" b="1">
                 <a:solidFill>
-                  <a:srgbClr val="1F4D2B"/>
-                </a:solidFill>
-                <a:latin typeface="Georgia"/>
+                  <a:srgbClr val="1B1A17"/>
+                </a:solidFill>
+                <a:latin typeface="Rockwell"/>
               </a:rPr>
               <a:t>Artwork for F-P19 · Eat the rainbow</a:t>
             </a:r>
@@ -12001,9 +12001,9 @@
             <a:r>
               <a:rPr sz="1100" b="0">
                 <a:solidFill>
-                  <a:srgbClr val="20190F"/>
-                </a:solidFill>
-                <a:latin typeface="Arial"/>
+                  <a:srgbClr val="1B1A17"/>
+                </a:solidFill>
+                <a:latin typeface="Verdana"/>
               </a:rPr>
               <a:t>A large round enamel plate from above, divided: half filled with vegetables and fruit of many colours (dark green leaves, orange pumpkin slices, red tomato, purple beetroot), a quarter with pap, a quarter with beans and an egg. Around the plate, a family: a gogo, a mother, a toddler on a lap, a school child — eating together. Along the bottom, four small…</a:t>
             </a:r>
@@ -12024,7 +12024,7 @@
     <p:bg>
       <p:bgPr>
         <a:solidFill>
-          <a:srgbClr val="F7F2E9"/>
+          <a:srgbClr val="EFE6D2"/>
         </a:solidFill>
         <a:effectLst/>
       </p:bgPr>
@@ -12066,9 +12066,9 @@
             <a:r>
               <a:rPr sz="1000" b="0">
                 <a:solidFill>
-                  <a:srgbClr val="6B6255"/>
-                </a:solidFill>
-                <a:latin typeface="Arial"/>
+                  <a:srgbClr val="1B1A17"/>
+                </a:solidFill>
+                <a:latin typeface="Verdana"/>
               </a:rPr>
               <a:t>F-D5-08</a:t>
             </a:r>
@@ -12105,9 +12105,9 @@
             <a:r>
               <a:rPr sz="1000" b="0">
                 <a:solidFill>
-                  <a:srgbClr val="6B6255"/>
-                </a:solidFill>
-                <a:latin typeface="Arial"/>
+                  <a:srgbClr val="1B1A17"/>
+                </a:solidFill>
+                <a:latin typeface="Verdana"/>
               </a:rPr>
               <a:t>Grow Food, Grow Strong</a:t>
             </a:r>
@@ -12129,7 +12129,7 @@
             <a:avLst/>
           </a:prstGeom>
           <a:solidFill>
-            <a:srgbClr val="C07A1E"/>
+            <a:srgbClr val="B24E2A"/>
           </a:solidFill>
           <a:ln>
             <a:noFill/>
@@ -12188,9 +12188,9 @@
             <a:r>
               <a:rPr sz="1400" b="1">
                 <a:solidFill>
-                  <a:srgbClr val="F7F2E9"/>
-                </a:solidFill>
-                <a:latin typeface="Arial"/>
+                  <a:srgbClr val="EFE6D2"/>
+                </a:solidFill>
+                <a:latin typeface="Verdana"/>
               </a:rPr>
               <a:t>YOUR TURN</a:t>
             </a:r>
@@ -12227,9 +12227,9 @@
             <a:r>
               <a:rPr sz="3800" b="1">
                 <a:solidFill>
-                  <a:srgbClr val="1F4D2B"/>
-                </a:solidFill>
-                <a:latin typeface="Georgia"/>
+                  <a:srgbClr val="1B1A17"/>
+                </a:solidFill>
+                <a:latin typeface="Rockwell"/>
               </a:rPr>
               <a:t>Plate game</a:t>
             </a:r>
@@ -12251,7 +12251,7 @@
             <a:avLst/>
           </a:prstGeom>
           <a:solidFill>
-            <a:srgbClr val="E2D8C4"/>
+            <a:srgbClr val="2F5D34"/>
           </a:solidFill>
           <a:ln>
             <a:noFill/>
@@ -12310,9 +12310,9 @@
             <a:r>
               <a:rPr sz="2600" b="1">
                 <a:solidFill>
-                  <a:srgbClr val="20190F"/>
-                </a:solidFill>
-                <a:latin typeface="Arial"/>
+                  <a:srgbClr val="1B1A17"/>
+                </a:solidFill>
+                <a:latin typeface="Verdana"/>
               </a:rPr>
               <a:t>•  3 plates for a family with a small child</a:t>
             </a:r>
@@ -12326,9 +12326,9 @@
             <a:r>
               <a:rPr sz="2600" b="1">
                 <a:solidFill>
-                  <a:srgbClr val="20190F"/>
-                </a:solidFill>
-                <a:latin typeface="Arial"/>
+                  <a:srgbClr val="1B1A17"/>
+                </a:solidFill>
+                <a:latin typeface="Verdana"/>
               </a:rPr>
               <a:t>•  At least 4 colours in the day</a:t>
             </a:r>
@@ -12350,11 +12350,11 @@
             <a:avLst/>
           </a:prstGeom>
           <a:solidFill>
-            <a:srgbClr val="FBF6EC"/>
+            <a:srgbClr val="EFE6D2"/>
           </a:solidFill>
           <a:ln w="15875">
             <a:solidFill>
-              <a:srgbClr val="E2D8C4"/>
+              <a:srgbClr val="2F5D34"/>
             </a:solidFill>
           </a:ln>
           <a:effectLst/>
@@ -12411,9 +12411,9 @@
             <a:r>
               <a:rPr sz="1200" b="1">
                 <a:solidFill>
-                  <a:srgbClr val="C07A1E"/>
-                </a:solidFill>
-                <a:latin typeface="Arial"/>
+                  <a:srgbClr val="B24E2A"/>
+                </a:solidFill>
+                <a:latin typeface="Verdana"/>
               </a:rPr>
               <a:t>IMAGE · F-IMG-50 · coming</a:t>
             </a:r>
@@ -12450,9 +12450,9 @@
             <a:r>
               <a:rPr sz="1800" b="1">
                 <a:solidFill>
-                  <a:srgbClr val="1F4D2B"/>
-                </a:solidFill>
-                <a:latin typeface="Georgia"/>
+                  <a:srgbClr val="1B1A17"/>
+                </a:solidFill>
+                <a:latin typeface="Rockwell"/>
               </a:rPr>
               <a:t>Food card — dark green leaves bundle (spinach/morogo)</a:t>
             </a:r>
@@ -12489,9 +12489,9 @@
             <a:r>
               <a:rPr sz="1100" b="0">
                 <a:solidFill>
-                  <a:srgbClr val="20190F"/>
-                </a:solidFill>
-                <a:latin typeface="Arial"/>
+                  <a:srgbClr val="1B1A17"/>
+                </a:solidFill>
+                <a:latin typeface="Verdana"/>
               </a:rPr>
               <a:t>Dark green leaves bundle (spinach/morogo) as it looks in a South African kitchen, on a plain Paper background, no text. Sized to be cut out and placed on a paper plate.</a:t>
             </a:r>
@@ -12512,7 +12512,7 @@
     <p:bg>
       <p:bgPr>
         <a:solidFill>
-          <a:srgbClr val="F7F2E9"/>
+          <a:srgbClr val="EFE6D2"/>
         </a:solidFill>
         <a:effectLst/>
       </p:bgPr>
@@ -12554,9 +12554,9 @@
             <a:r>
               <a:rPr sz="1000" b="0">
                 <a:solidFill>
-                  <a:srgbClr val="6B6255"/>
-                </a:solidFill>
-                <a:latin typeface="Arial"/>
+                  <a:srgbClr val="1B1A17"/>
+                </a:solidFill>
+                <a:latin typeface="Verdana"/>
               </a:rPr>
               <a:t>F-D5-09</a:t>
             </a:r>
@@ -12593,9 +12593,9 @@
             <a:r>
               <a:rPr sz="1000" b="0">
                 <a:solidFill>
-                  <a:srgbClr val="6B6255"/>
-                </a:solidFill>
-                <a:latin typeface="Arial"/>
+                  <a:srgbClr val="1B1A17"/>
+                </a:solidFill>
+                <a:latin typeface="Verdana"/>
               </a:rPr>
               <a:t>Grow Food, Grow Strong</a:t>
             </a:r>
@@ -12617,7 +12617,7 @@
             <a:avLst/>
           </a:prstGeom>
           <a:solidFill>
-            <a:srgbClr val="C07A1E"/>
+            <a:srgbClr val="B24E2A"/>
           </a:solidFill>
           <a:ln>
             <a:noFill/>
@@ -12676,9 +12676,9 @@
             <a:r>
               <a:rPr sz="1400" b="1">
                 <a:solidFill>
-                  <a:srgbClr val="F7F2E9"/>
-                </a:solidFill>
-                <a:latin typeface="Arial"/>
+                  <a:srgbClr val="EFE6D2"/>
+                </a:solidFill>
+                <a:latin typeface="Verdana"/>
               </a:rPr>
               <a:t>YOUR TURN</a:t>
             </a:r>
@@ -12715,9 +12715,9 @@
             <a:r>
               <a:rPr sz="3800" b="1">
                 <a:solidFill>
-                  <a:srgbClr val="1F4D2B"/>
-                </a:solidFill>
-                <a:latin typeface="Georgia"/>
+                  <a:srgbClr val="1B1A17"/>
+                </a:solidFill>
+                <a:latin typeface="Rockwell"/>
               </a:rPr>
               <a:t>A year of colour</a:t>
             </a:r>
@@ -12739,7 +12739,7 @@
             <a:avLst/>
           </a:prstGeom>
           <a:solidFill>
-            <a:srgbClr val="E2D8C4"/>
+            <a:srgbClr val="2F5D34"/>
           </a:solidFill>
           <a:ln>
             <a:noFill/>
@@ -12798,9 +12798,9 @@
             <a:r>
               <a:rPr sz="3000" b="1">
                 <a:solidFill>
-                  <a:srgbClr val="20190F"/>
-                </a:solidFill>
-                <a:latin typeface="Arial"/>
+                  <a:srgbClr val="1B1A17"/>
+                </a:solidFill>
+                <a:latin typeface="Verdana"/>
               </a:rPr>
               <a:t>•  Summer crops · winter crops</a:t>
             </a:r>
@@ -12814,9 +12814,9 @@
             <a:r>
               <a:rPr sz="3000" b="1">
                 <a:solidFill>
-                  <a:srgbClr val="20190F"/>
-                </a:solidFill>
-                <a:latin typeface="Arial"/>
+                  <a:srgbClr val="1B1A17"/>
+                </a:solidFill>
+                <a:latin typeface="Verdana"/>
               </a:rPr>
               <a:t>•  Something to pick every month</a:t>
             </a:r>
@@ -12838,11 +12838,11 @@
             <a:avLst/>
           </a:prstGeom>
           <a:solidFill>
-            <a:srgbClr val="FBF6EC"/>
+            <a:srgbClr val="EFE6D2"/>
           </a:solidFill>
           <a:ln w="15875">
             <a:solidFill>
-              <a:srgbClr val="E2D8C4"/>
+              <a:srgbClr val="2F5D34"/>
             </a:solidFill>
           </a:ln>
           <a:effectLst/>
@@ -12899,9 +12899,9 @@
             <a:r>
               <a:rPr sz="1200" b="1">
                 <a:solidFill>
-                  <a:srgbClr val="C07A1E"/>
-                </a:solidFill>
-                <a:latin typeface="Arial"/>
+                  <a:srgbClr val="B24E2A"/>
+                </a:solidFill>
+                <a:latin typeface="Verdana"/>
               </a:rPr>
               <a:t>IMAGE · F-IMG-32 · coming</a:t>
             </a:r>
@@ -12938,9 +12938,9 @@
             <a:r>
               <a:rPr sz="1800" b="1">
                 <a:solidFill>
-                  <a:srgbClr val="1F4D2B"/>
-                </a:solidFill>
-                <a:latin typeface="Georgia"/>
+                  <a:srgbClr val="1B1A17"/>
+                </a:solidFill>
+                <a:latin typeface="Rockwell"/>
               </a:rPr>
               <a:t>A year of colour</a:t>
             </a:r>
@@ -12977,9 +12977,9 @@
             <a:r>
               <a:rPr sz="1100" b="0">
                 <a:solidFill>
-                  <a:srgbClr val="20190F"/>
-                </a:solidFill>
-                <a:latin typeface="Arial"/>
+                  <a:srgbClr val="1B1A17"/>
+                </a:solidFill>
+                <a:latin typeface="Verdana"/>
               </a:rPr>
               <a:t>A circular calendar ring divided into 12 segments, the top half (summer) full of warm-season vegetable shapes, the bottom half (winter) of cool-season leaf and root shapes.</a:t>
             </a:r>

--- a/courses/build/farmer-5day/F-D5.pptx
+++ b/courses/build/farmer-5day/F-D5.pptx
@@ -596,7 +596,7 @@
           <a:p/>
           <a:p>
             <a:r>
-              <a:t>Clip F-ANI-28: public/course-animations/market-community/watch-09-surplus-routes.mp4</a:t>
+              <a:t>Clip F-ANI-28: public/course-media/farmer-5day/F-ANI-28.mp4</a:t>
             </a:r>
           </a:p>
         </p:txBody>
@@ -823,7 +823,7 @@
           </a:p>
           <a:p>
             <a:r>
-              <a:t>Clip F-ANI-29: public/course-animations/market-community/watch-04-farm-record.mp4</a:t>
+              <a:t>Clip F-ANI-29: public/course-media/farmer-5day/F-ANI-29.mp4</a:t>
             </a:r>
           </a:p>
         </p:txBody>
@@ -5573,49 +5573,27 @@
           </a:p>
         </p:txBody>
       </p:sp>
-      <p:pic>
-        <p:nvPicPr>
-          <p:cNvPr id="9" name="Picture 8" descr="watch-09-surplus-routes.jpg"/>
-          <p:cNvPicPr>
-            <a:picLocks noChangeAspect="1"/>
-          </p:cNvPicPr>
-          <p:nvPr/>
-        </p:nvPicPr>
-        <p:blipFill>
-          <a:blip r:embed="rId2"/>
-          <a:stretch>
-            <a:fillRect/>
-          </a:stretch>
-        </p:blipFill>
-        <p:spPr>
-          <a:xfrm>
-            <a:off x="5852160" y="2514600"/>
-            <a:ext cx="5852160" cy="3291840"/>
-          </a:xfrm>
-          <a:prstGeom prst="rect">
-            <a:avLst/>
-          </a:prstGeom>
-        </p:spPr>
-      </p:pic>
-      <p:sp>
-        <p:nvSpPr>
-          <p:cNvPr id="10" name="Rectangle 9"/>
+      <p:sp>
+        <p:nvSpPr>
+          <p:cNvPr id="9" name="Rectangle 8"/>
           <p:cNvSpPr/>
           <p:nvPr/>
         </p:nvSpPr>
         <p:spPr>
           <a:xfrm>
-            <a:off x="5852160" y="5806440"/>
-            <a:ext cx="5852160" cy="411480"/>
+            <a:off x="5852160" y="2103120"/>
+            <a:ext cx="5852160" cy="4114800"/>
           </a:xfrm>
           <a:prstGeom prst="rect">
             <a:avLst/>
           </a:prstGeom>
           <a:solidFill>
-            <a:srgbClr val="1B1A17"/>
+            <a:srgbClr val="EFE6D2"/>
           </a:solidFill>
-          <a:ln>
-            <a:noFill/>
+          <a:ln w="15875">
+            <a:solidFill>
+              <a:srgbClr val="2F5D34"/>
+            </a:solidFill>
           </a:ln>
           <a:effectLst/>
         </p:spPr>
@@ -5643,14 +5621,53 @@
       </p:sp>
       <p:sp>
         <p:nvSpPr>
+          <p:cNvPr id="10" name="TextBox 9"/>
+          <p:cNvSpPr txBox="1"/>
+          <p:nvPr/>
+        </p:nvSpPr>
+        <p:spPr>
+          <a:xfrm>
+            <a:off x="6080760" y="2286000"/>
+            <a:ext cx="5394960" cy="365760"/>
+          </a:xfrm>
+          <a:prstGeom prst="rect">
+            <a:avLst/>
+          </a:prstGeom>
+          <a:noFill/>
+        </p:spPr>
+        <p:txBody>
+          <a:bodyPr wrap="square" anchor="t" lIns="45720" rIns="45720">
+            <a:spAutoFit/>
+          </a:bodyPr>
+          <a:lstStyle/>
+          <a:p>
+            <a:pPr algn="l">
+              <a:spcAft>
+                <a:spcPts val="800"/>
+              </a:spcAft>
+            </a:pPr>
+            <a:r>
+              <a:rPr sz="1200" b="1">
+                <a:solidFill>
+                  <a:srgbClr val="B24E2A"/>
+                </a:solidFill>
+                <a:latin typeface="Verdana"/>
+              </a:rPr>
+              <a:t>ANIMATION · F-ANI-28 · coming</a:t>
+            </a:r>
+          </a:p>
+        </p:txBody>
+      </p:sp>
+      <p:sp>
+        <p:nvSpPr>
           <p:cNvPr id="11" name="TextBox 10"/>
           <p:cNvSpPr txBox="1"/>
           <p:nvPr/>
         </p:nvSpPr>
         <p:spPr>
           <a:xfrm>
-            <a:off x="5943600" y="5815584"/>
-            <a:ext cx="5669280" cy="384048"/>
+            <a:off x="6080760" y="2670048"/>
+            <a:ext cx="5394960" cy="457200"/>
           </a:xfrm>
           <a:prstGeom prst="rect">
             <a:avLst/>
@@ -5658,7 +5675,7 @@
           <a:noFill/>
         </p:spPr>
         <p:txBody>
-          <a:bodyPr wrap="square" anchor="ctr" lIns="45720" rIns="45720">
+          <a:bodyPr wrap="square" anchor="t" lIns="45720" rIns="45720">
             <a:spAutoFit/>
           </a:bodyPr>
           <a:lstStyle/>
@@ -5669,13 +5686,52 @@
               </a:spcAft>
             </a:pPr>
             <a:r>
+              <a:rPr sz="1800" b="1">
+                <a:solidFill>
+                  <a:srgbClr val="1B1A17"/>
+                </a:solidFill>
+                <a:latin typeface="Rockwell"/>
+              </a:rPr>
+              <a:t>Surplus routes</a:t>
+            </a:r>
+          </a:p>
+        </p:txBody>
+      </p:sp>
+      <p:sp>
+        <p:nvSpPr>
+          <p:cNvPr id="12" name="TextBox 11"/>
+          <p:cNvSpPr txBox="1"/>
+          <p:nvPr/>
+        </p:nvSpPr>
+        <p:spPr>
+          <a:xfrm>
+            <a:off x="6080760" y="3200400"/>
+            <a:ext cx="5394960" cy="2834640"/>
+          </a:xfrm>
+          <a:prstGeom prst="rect">
+            <a:avLst/>
+          </a:prstGeom>
+          <a:noFill/>
+        </p:spPr>
+        <p:txBody>
+          <a:bodyPr wrap="square" anchor="t" lIns="45720" rIns="45720">
+            <a:spAutoFit/>
+          </a:bodyPr>
+          <a:lstStyle/>
+          <a:p>
+            <a:pPr algn="l">
+              <a:spcAft>
+                <a:spcPts val="800"/>
+              </a:spcAft>
+            </a:pPr>
+            <a:r>
               <a:rPr sz="1100" b="0">
                 <a:solidFill>
-                  <a:srgbClr val="EFE6D2"/>
+                  <a:srgbClr val="1B1A17"/>
                 </a:solidFill>
                 <a:latin typeface="Verdana"/>
               </a:rPr>
-              <a:t>▶  Clip F-ANI-28 · play from the tablet: watch-09-surplus-routes.mp4</a:t>
+              <a:t>A basket of harvested vegetables at a homestead; paths lead to three destinations one by one: the family table, a neighbour at the fence, and a small roadside table where a buyer hands over plain generic money (no real currency). (Replaces the withdrawn clip `market-community/watch-09-surplus-routes.mp4`.)</a:t>
             </a:r>
           </a:p>
         </p:txBody>
@@ -6815,49 +6871,27 @@
           </a:p>
         </p:txBody>
       </p:sp>
-      <p:pic>
-        <p:nvPicPr>
-          <p:cNvPr id="7" name="Picture 6" descr="watch-04-farm-record.jpg"/>
-          <p:cNvPicPr>
-            <a:picLocks noChangeAspect="1"/>
-          </p:cNvPicPr>
-          <p:nvPr/>
-        </p:nvPicPr>
-        <p:blipFill>
-          <a:blip r:embed="rId2"/>
-          <a:stretch>
-            <a:fillRect/>
-          </a:stretch>
-        </p:blipFill>
-        <p:spPr>
-          <a:xfrm>
-            <a:off x="5852160" y="2308860"/>
-            <a:ext cx="5852160" cy="3291840"/>
-          </a:xfrm>
-          <a:prstGeom prst="rect">
-            <a:avLst/>
-          </a:prstGeom>
-        </p:spPr>
-      </p:pic>
-      <p:sp>
-        <p:nvSpPr>
-          <p:cNvPr id="8" name="Rectangle 7"/>
+      <p:sp>
+        <p:nvSpPr>
+          <p:cNvPr id="7" name="Rectangle 6"/>
           <p:cNvSpPr/>
           <p:nvPr/>
         </p:nvSpPr>
         <p:spPr>
           <a:xfrm>
-            <a:off x="5852160" y="5806440"/>
-            <a:ext cx="5852160" cy="411480"/>
+            <a:off x="5852160" y="1691640"/>
+            <a:ext cx="5852160" cy="4526280"/>
           </a:xfrm>
           <a:prstGeom prst="rect">
             <a:avLst/>
           </a:prstGeom>
           <a:solidFill>
-            <a:srgbClr val="1B1A17"/>
+            <a:srgbClr val="EFE6D2"/>
           </a:solidFill>
-          <a:ln>
-            <a:noFill/>
+          <a:ln w="15875">
+            <a:solidFill>
+              <a:srgbClr val="2F5D34"/>
+            </a:solidFill>
           </a:ln>
           <a:effectLst/>
         </p:spPr>
@@ -6885,14 +6919,53 @@
       </p:sp>
       <p:sp>
         <p:nvSpPr>
+          <p:cNvPr id="8" name="TextBox 7"/>
+          <p:cNvSpPr txBox="1"/>
+          <p:nvPr/>
+        </p:nvSpPr>
+        <p:spPr>
+          <a:xfrm>
+            <a:off x="6080760" y="1874520"/>
+            <a:ext cx="5394960" cy="365760"/>
+          </a:xfrm>
+          <a:prstGeom prst="rect">
+            <a:avLst/>
+          </a:prstGeom>
+          <a:noFill/>
+        </p:spPr>
+        <p:txBody>
+          <a:bodyPr wrap="square" anchor="t" lIns="45720" rIns="45720">
+            <a:spAutoFit/>
+          </a:bodyPr>
+          <a:lstStyle/>
+          <a:p>
+            <a:pPr algn="l">
+              <a:spcAft>
+                <a:spcPts val="800"/>
+              </a:spcAft>
+            </a:pPr>
+            <a:r>
+              <a:rPr sz="1200" b="1">
+                <a:solidFill>
+                  <a:srgbClr val="B24E2A"/>
+                </a:solidFill>
+                <a:latin typeface="Verdana"/>
+              </a:rPr>
+              <a:t>ANIMATION · F-ANI-29 · coming</a:t>
+            </a:r>
+          </a:p>
+        </p:txBody>
+      </p:sp>
+      <p:sp>
+        <p:nvSpPr>
           <p:cNvPr id="9" name="TextBox 8"/>
           <p:cNvSpPr txBox="1"/>
           <p:nvPr/>
         </p:nvSpPr>
         <p:spPr>
           <a:xfrm>
-            <a:off x="5943600" y="5815584"/>
-            <a:ext cx="5669280" cy="384048"/>
+            <a:off x="6080760" y="2258568"/>
+            <a:ext cx="5394960" cy="457200"/>
           </a:xfrm>
           <a:prstGeom prst="rect">
             <a:avLst/>
@@ -6900,7 +6973,7 @@
           <a:noFill/>
         </p:spPr>
         <p:txBody>
-          <a:bodyPr wrap="square" anchor="ctr" lIns="45720" rIns="45720">
+          <a:bodyPr wrap="square" anchor="t" lIns="45720" rIns="45720">
             <a:spAutoFit/>
           </a:bodyPr>
           <a:lstStyle/>
@@ -6911,13 +6984,52 @@
               </a:spcAft>
             </a:pPr>
             <a:r>
+              <a:rPr sz="1800" b="1">
+                <a:solidFill>
+                  <a:srgbClr val="1B1A17"/>
+                </a:solidFill>
+                <a:latin typeface="Rockwell"/>
+              </a:rPr>
+              <a:t>Farm record</a:t>
+            </a:r>
+          </a:p>
+        </p:txBody>
+      </p:sp>
+      <p:sp>
+        <p:nvSpPr>
+          <p:cNvPr id="10" name="TextBox 9"/>
+          <p:cNvSpPr txBox="1"/>
+          <p:nvPr/>
+        </p:nvSpPr>
+        <p:spPr>
+          <a:xfrm>
+            <a:off x="6080760" y="2788920"/>
+            <a:ext cx="5394960" cy="3246120"/>
+          </a:xfrm>
+          <a:prstGeom prst="rect">
+            <a:avLst/>
+          </a:prstGeom>
+          <a:noFill/>
+        </p:spPr>
+        <p:txBody>
+          <a:bodyPr wrap="square" anchor="t" lIns="45720" rIns="45720">
+            <a:spAutoFit/>
+          </a:bodyPr>
+          <a:lstStyle/>
+          <a:p>
+            <a:pPr algn="l">
+              <a:spcAft>
+                <a:spcPts val="800"/>
+              </a:spcAft>
+            </a:pPr>
+            <a:r>
               <a:rPr sz="1100" b="0">
                 <a:solidFill>
-                  <a:srgbClr val="EFE6D2"/>
+                  <a:srgbClr val="1B1A17"/>
                 </a:solidFill>
                 <a:latin typeface="Verdana"/>
               </a:rPr>
-              <a:t>▶  Clip F-ANI-29 · play from the tablet: watch-04-farm-record.mp4</a:t>
+              <a:t>A hand makes tally marks in two columns of a simple exercise book beside a basket of harvested greens and a hanging scale; bunches move from the basket into three piles (eat, share, sell) as marks appear. Marks are simple strokes, never readable writing. (Replaces the withdrawn clip `market-community/watch-04-farm-record.mp4`.)</a:t>
             </a:r>
           </a:p>
         </p:txBody>
